--- a/slides/T319_Regressão_Linear (Parte V).pptx
+++ b/slides/T319_Regressão_Linear (Parte V).pptx
@@ -144,12 +144,12 @@
 <p1510:revInfo xmlns:a="http://schemas.openxmlformats.org/drawingml/2006/main" xmlns:r="http://schemas.openxmlformats.org/officeDocument/2006/relationships" xmlns:p1510="http://schemas.microsoft.com/office/powerpoint/2015/10/main">
   <p1510:revLst>
     <p1510:client id="{20CAF96C-3A3A-4667-836E-5D2043E55A0D}" v="89" dt="2020-02-17T16:29:36.671"/>
+    <p1510:client id="{BAE3137E-5ED2-488F-90AA-67C3B75162E2}" v="4" dt="2020-04-06T18:41:56.776"/>
     <p1510:client id="{328F8323-A8B4-4BB5-8B29-141FF986EA24}" v="11" dt="2020-04-06T19:56:50.842"/>
     <p1510:client id="{58D05219-7C7B-4B91-A7AF-DC0AF21441D4}" v="8" dt="2020-03-15T18:19:04.037"/>
     <p1510:client id="{62FC7D01-7DC2-4ECC-8EE4-941CF425DBEE}" v="272" dt="2020-04-04T01:47:57.654"/>
     <p1510:client id="{7B93843C-DFF4-4B6D-9934-AB8C4C568E2D}" v="86" dt="2020-03-14T00:29:41.866"/>
     <p1510:client id="{B7CA8C48-7DAD-40D1-BA98-01463637147D}" v="67" dt="2020-03-14T21:04:21.668"/>
-    <p1510:client id="{BAE3137E-5ED2-488F-90AA-67C3B75162E2}" v="4" dt="2020-04-06T18:41:56.776"/>
   </p1510:revLst>
 </p1510:revInfo>
 </file>
@@ -549,7 +549,7 @@
           <a:p>
             <a:fld id="{DAF0AF11-6A8A-4E64-94F5-26D4FBA2A01D}" type="datetimeFigureOut">
               <a:rPr lang="nl-BE" smtClean="0"/>
-              <a:t>20/11/2025</a:t>
+              <a:t>19/05/2026</a:t>
             </a:fld>
             <a:endParaRPr lang="nl-BE"/>
           </a:p>
@@ -4406,7 +4406,7 @@
           <a:p>
             <a:fld id="{C80E15A5-E95B-43EB-9AC7-9A96397448C0}" type="datetimeFigureOut">
               <a:rPr lang="nl-BE" smtClean="0"/>
-              <a:t>20/11/2025</a:t>
+              <a:t>19/05/2026</a:t>
             </a:fld>
             <a:endParaRPr lang="nl-BE"/>
           </a:p>
@@ -4576,7 +4576,7 @@
           <a:p>
             <a:fld id="{C80E15A5-E95B-43EB-9AC7-9A96397448C0}" type="datetimeFigureOut">
               <a:rPr lang="nl-BE" smtClean="0"/>
-              <a:t>20/11/2025</a:t>
+              <a:t>19/05/2026</a:t>
             </a:fld>
             <a:endParaRPr lang="nl-BE"/>
           </a:p>
@@ -4756,7 +4756,7 @@
           <a:p>
             <a:fld id="{C80E15A5-E95B-43EB-9AC7-9A96397448C0}" type="datetimeFigureOut">
               <a:rPr lang="nl-BE" smtClean="0"/>
-              <a:t>20/11/2025</a:t>
+              <a:t>19/05/2026</a:t>
             </a:fld>
             <a:endParaRPr lang="nl-BE"/>
           </a:p>
@@ -4926,7 +4926,7 @@
           <a:p>
             <a:fld id="{C80E15A5-E95B-43EB-9AC7-9A96397448C0}" type="datetimeFigureOut">
               <a:rPr lang="nl-BE" smtClean="0"/>
-              <a:t>20/11/2025</a:t>
+              <a:t>19/05/2026</a:t>
             </a:fld>
             <a:endParaRPr lang="nl-BE"/>
           </a:p>
@@ -5172,7 +5172,7 @@
           <a:p>
             <a:fld id="{C80E15A5-E95B-43EB-9AC7-9A96397448C0}" type="datetimeFigureOut">
               <a:rPr lang="nl-BE" smtClean="0"/>
-              <a:t>20/11/2025</a:t>
+              <a:t>19/05/2026</a:t>
             </a:fld>
             <a:endParaRPr lang="nl-BE"/>
           </a:p>
@@ -5404,7 +5404,7 @@
           <a:p>
             <a:fld id="{C80E15A5-E95B-43EB-9AC7-9A96397448C0}" type="datetimeFigureOut">
               <a:rPr lang="nl-BE" smtClean="0"/>
-              <a:t>20/11/2025</a:t>
+              <a:t>19/05/2026</a:t>
             </a:fld>
             <a:endParaRPr lang="nl-BE"/>
           </a:p>
@@ -5771,7 +5771,7 @@
           <a:p>
             <a:fld id="{C80E15A5-E95B-43EB-9AC7-9A96397448C0}" type="datetimeFigureOut">
               <a:rPr lang="nl-BE" smtClean="0"/>
-              <a:t>20/11/2025</a:t>
+              <a:t>19/05/2026</a:t>
             </a:fld>
             <a:endParaRPr lang="nl-BE"/>
           </a:p>
@@ -5889,7 +5889,7 @@
           <a:p>
             <a:fld id="{C80E15A5-E95B-43EB-9AC7-9A96397448C0}" type="datetimeFigureOut">
               <a:rPr lang="nl-BE" smtClean="0"/>
-              <a:t>20/11/2025</a:t>
+              <a:t>19/05/2026</a:t>
             </a:fld>
             <a:endParaRPr lang="nl-BE"/>
           </a:p>
@@ -5984,7 +5984,7 @@
           <a:p>
             <a:fld id="{C80E15A5-E95B-43EB-9AC7-9A96397448C0}" type="datetimeFigureOut">
               <a:rPr lang="nl-BE" smtClean="0"/>
-              <a:t>20/11/2025</a:t>
+              <a:t>19/05/2026</a:t>
             </a:fld>
             <a:endParaRPr lang="nl-BE"/>
           </a:p>
@@ -6261,7 +6261,7 @@
           <a:p>
             <a:fld id="{C80E15A5-E95B-43EB-9AC7-9A96397448C0}" type="datetimeFigureOut">
               <a:rPr lang="nl-BE" smtClean="0"/>
-              <a:t>20/11/2025</a:t>
+              <a:t>19/05/2026</a:t>
             </a:fld>
             <a:endParaRPr lang="nl-BE"/>
           </a:p>
@@ -6514,7 +6514,7 @@
           <a:p>
             <a:fld id="{C80E15A5-E95B-43EB-9AC7-9A96397448C0}" type="datetimeFigureOut">
               <a:rPr lang="nl-BE" smtClean="0"/>
-              <a:t>20/11/2025</a:t>
+              <a:t>19/05/2026</a:t>
             </a:fld>
             <a:endParaRPr lang="nl-BE"/>
           </a:p>
@@ -6727,7 +6727,7 @@
           <a:p>
             <a:fld id="{C80E15A5-E95B-43EB-9AC7-9A96397448C0}" type="datetimeFigureOut">
               <a:rPr lang="nl-BE" smtClean="0"/>
-              <a:t>20/11/2025</a:t>
+              <a:t>19/05/2026</a:t>
             </a:fld>
             <a:endParaRPr lang="nl-BE"/>
           </a:p>
@@ -7137,7 +7137,7 @@
           <p:cNvPr id="2" name="Título 1">
             <a:extLst>
               <a:ext uri="{FF2B5EF4-FFF2-40B4-BE49-F238E27FC236}">
-                <a16:creationId xmlns:a16="http://schemas.microsoft.com/office/drawing/2014/main" xmlns="" id="{32666AC8-2E17-4DB4-B0F5-60C640CCFD2E}"/>
+                <a16:creationId xmlns:a16="http://schemas.microsoft.com/office/drawing/2014/main" id="{32666AC8-2E17-4DB4-B0F5-60C640CCFD2E}"/>
               </a:ext>
             </a:extLst>
           </p:cNvPr>
@@ -7164,10 +7164,6 @@
               <a:rPr lang="pt-BR" sz="5400" dirty="0"/>
               <a:t>T319 - Introdução ao Aprendizado de Máquina:</a:t>
             </a:r>
-            <a:r>
-              <a:rPr lang="pt-BR" dirty="0"/>
-              <a:t/>
-            </a:r>
             <a:br>
               <a:rPr lang="pt-BR" dirty="0"/>
             </a:br>
@@ -7183,7 +7179,7 @@
           <p:cNvPr id="4" name="CaixaDeTexto 3">
             <a:extLst>
               <a:ext uri="{FF2B5EF4-FFF2-40B4-BE49-F238E27FC236}">
-                <a16:creationId xmlns:a16="http://schemas.microsoft.com/office/drawing/2014/main" xmlns="" id="{430EB894-B7D4-434C-9D1A-A14094D9BEEC}"/>
+                <a16:creationId xmlns:a16="http://schemas.microsoft.com/office/drawing/2014/main" id="{430EB894-B7D4-434C-9D1A-A14094D9BEEC}"/>
               </a:ext>
             </a:extLst>
           </p:cNvPr>
@@ -7224,7 +7220,7 @@
           <p:cNvPr id="1026" name="Picture 2" descr="Logo">
             <a:extLst>
               <a:ext uri="{FF2B5EF4-FFF2-40B4-BE49-F238E27FC236}">
-                <a16:creationId xmlns:a16="http://schemas.microsoft.com/office/drawing/2014/main" xmlns="" id="{3F2642E0-4F6A-4196-8F58-E77D36E9A33F}"/>
+                <a16:creationId xmlns:a16="http://schemas.microsoft.com/office/drawing/2014/main" id="{3F2642E0-4F6A-4196-8F58-E77D36E9A33F}"/>
               </a:ext>
             </a:extLst>
           </p:cNvPr>
@@ -7269,7 +7265,7 @@
           <p:cNvPr id="5122" name="Picture 2" descr="Image result for machine learning">
             <a:extLst>
               <a:ext uri="{FF2B5EF4-FFF2-40B4-BE49-F238E27FC236}">
-                <a16:creationId xmlns:a16="http://schemas.microsoft.com/office/drawing/2014/main" xmlns="" id="{810CE0A2-4102-44A6-A370-175E7896CDCB}"/>
+                <a16:creationId xmlns:a16="http://schemas.microsoft.com/office/drawing/2014/main" id="{810CE0A2-4102-44A6-A370-175E7896CDCB}"/>
               </a:ext>
             </a:extLst>
           </p:cNvPr>
@@ -7346,7 +7342,7 @@
               <p:cNvPr id="2" name="Título 1">
                 <a:extLst>
                   <a:ext uri="{FF2B5EF4-FFF2-40B4-BE49-F238E27FC236}">
-                    <a16:creationId xmlns:a16="http://schemas.microsoft.com/office/drawing/2014/main" xmlns="" id="{C5C2477C-2D2C-D4E3-DD60-2911128E0DD0}"/>
+                    <a16:creationId xmlns:a16="http://schemas.microsoft.com/office/drawing/2014/main" id="{C5C2477C-2D2C-D4E3-DD60-2911128E0DD0}"/>
                   </a:ext>
                 </a:extLst>
               </p:cNvPr>
@@ -7434,7 +7430,7 @@
           <p:cNvPr id="3" name="Espaço Reservado para Conteúdo 2">
             <a:extLst>
               <a:ext uri="{FF2B5EF4-FFF2-40B4-BE49-F238E27FC236}">
-                <a16:creationId xmlns:a16="http://schemas.microsoft.com/office/drawing/2014/main" xmlns="" id="{C81D5EE1-D440-6F4D-3F1E-ED8B0B4036BF}"/>
+                <a16:creationId xmlns:a16="http://schemas.microsoft.com/office/drawing/2014/main" id="{C81D5EE1-D440-6F4D-3F1E-ED8B0B4036BF}"/>
               </a:ext>
             </a:extLst>
           </p:cNvPr>
@@ -7690,7 +7686,7 @@
               <p:cNvPr id="5" name="CaixaDeTexto 4">
                 <a:extLst>
                   <a:ext uri="{FF2B5EF4-FFF2-40B4-BE49-F238E27FC236}">
-                    <a16:creationId xmlns:a16="http://schemas.microsoft.com/office/drawing/2014/main" xmlns="" id="{3926FA82-F16F-7AE7-534B-5F7CB73CCD08}"/>
+                    <a16:creationId xmlns:a16="http://schemas.microsoft.com/office/drawing/2014/main" id="{3926FA82-F16F-7AE7-534B-5F7CB73CCD08}"/>
                   </a:ext>
                 </a:extLst>
               </p:cNvPr>
@@ -7783,7 +7779,7 @@
           <p:cNvPr id="10" name="Imagem 9">
             <a:extLst>
               <a:ext uri="{FF2B5EF4-FFF2-40B4-BE49-F238E27FC236}">
-                <a16:creationId xmlns:a16="http://schemas.microsoft.com/office/drawing/2014/main" xmlns="" id="{DEF6A211-DAF7-2C02-45BC-D2089FA5D178}"/>
+                <a16:creationId xmlns:a16="http://schemas.microsoft.com/office/drawing/2014/main" id="{DEF6A211-DAF7-2C02-45BC-D2089FA5D178}"/>
               </a:ext>
             </a:extLst>
           </p:cNvPr>
@@ -7850,7 +7846,7 @@
               <p:cNvPr id="2" name="Título 1">
                 <a:extLst>
                   <a:ext uri="{FF2B5EF4-FFF2-40B4-BE49-F238E27FC236}">
-                    <a16:creationId xmlns:a16="http://schemas.microsoft.com/office/drawing/2014/main" xmlns="" id="{9FBE2970-3CBA-404B-4074-AEE02EAAB9A6}"/>
+                    <a16:creationId xmlns:a16="http://schemas.microsoft.com/office/drawing/2014/main" id="{9FBE2970-3CBA-404B-4074-AEE02EAAB9A6}"/>
                   </a:ext>
                 </a:extLst>
               </p:cNvPr>
@@ -7938,7 +7934,7 @@
           <p:cNvPr id="3" name="Espaço Reservado para Conteúdo 2">
             <a:extLst>
               <a:ext uri="{FF2B5EF4-FFF2-40B4-BE49-F238E27FC236}">
-                <a16:creationId xmlns:a16="http://schemas.microsoft.com/office/drawing/2014/main" xmlns="" id="{F55CE789-94DC-AEE8-1D38-D05D40B0BF3A}"/>
+                <a16:creationId xmlns:a16="http://schemas.microsoft.com/office/drawing/2014/main" id="{F55CE789-94DC-AEE8-1D38-D05D40B0BF3A}"/>
               </a:ext>
             </a:extLst>
           </p:cNvPr>
@@ -8099,7 +8095,7 @@
           <p:cNvPr id="4" name="Imagem 3">
             <a:extLst>
               <a:ext uri="{FF2B5EF4-FFF2-40B4-BE49-F238E27FC236}">
-                <a16:creationId xmlns:a16="http://schemas.microsoft.com/office/drawing/2014/main" xmlns="" id="{4F49A66D-EE2E-954C-CE06-20034C4D7B7C}"/>
+                <a16:creationId xmlns:a16="http://schemas.microsoft.com/office/drawing/2014/main" id="{4F49A66D-EE2E-954C-CE06-20034C4D7B7C}"/>
               </a:ext>
             </a:extLst>
           </p:cNvPr>
@@ -8136,7 +8132,7 @@
               <p:cNvPr id="5" name="CaixaDeTexto 4">
                 <a:extLst>
                   <a:ext uri="{FF2B5EF4-FFF2-40B4-BE49-F238E27FC236}">
-                    <a16:creationId xmlns:a16="http://schemas.microsoft.com/office/drawing/2014/main" xmlns="" id="{A35580BE-2693-7A2B-E389-307D19EBC7B1}"/>
+                    <a16:creationId xmlns:a16="http://schemas.microsoft.com/office/drawing/2014/main" id="{A35580BE-2693-7A2B-E389-307D19EBC7B1}"/>
                   </a:ext>
                 </a:extLst>
               </p:cNvPr>
@@ -8261,7 +8257,7 @@
               <p:cNvPr id="2" name="Título 1">
                 <a:extLst>
                   <a:ext uri="{FF2B5EF4-FFF2-40B4-BE49-F238E27FC236}">
-                    <a16:creationId xmlns:a16="http://schemas.microsoft.com/office/drawing/2014/main" xmlns="" id="{39771852-6C63-AF70-4850-767FD5F1D2F6}"/>
+                    <a16:creationId xmlns:a16="http://schemas.microsoft.com/office/drawing/2014/main" id="{39771852-6C63-AF70-4850-767FD5F1D2F6}"/>
                   </a:ext>
                 </a:extLst>
               </p:cNvPr>
@@ -8351,7 +8347,7 @@
               <p:cNvPr id="3" name="Espaço Reservado para Conteúdo 2">
                 <a:extLst>
                   <a:ext uri="{FF2B5EF4-FFF2-40B4-BE49-F238E27FC236}">
-                    <a16:creationId xmlns:a16="http://schemas.microsoft.com/office/drawing/2014/main" xmlns="" id="{86A88D6D-1190-332D-27ED-32512817224F}"/>
+                    <a16:creationId xmlns:a16="http://schemas.microsoft.com/office/drawing/2014/main" id="{86A88D6D-1190-332D-27ED-32512817224F}"/>
                   </a:ext>
                 </a:extLst>
               </p:cNvPr>
@@ -8482,23 +8478,7 @@
                       <a:srgbClr val="00B0F0"/>
                     </a:solidFill>
                   </a:rPr>
-                  <a:t>avaliação </a:t>
-                </a:r>
-                <a:r>
-                  <a:rPr lang="pt-BR" b="1" i="1" dirty="0" smtClean="0">
-                    <a:solidFill>
-                      <a:srgbClr val="00B0F0"/>
-                    </a:solidFill>
-                  </a:rPr>
-                  <a:t>geral do </a:t>
-                </a:r>
-                <a:r>
-                  <a:rPr lang="pt-BR" b="1" i="1" dirty="0">
-                    <a:solidFill>
-                      <a:srgbClr val="00B0F0"/>
-                    </a:solidFill>
-                  </a:rPr>
-                  <a:t>modelo </a:t>
+                  <a:t>avaliação geral do modelo </a:t>
                 </a:r>
                 <a:r>
                   <a:rPr lang="pt-BR" b="1" i="1" dirty="0">
@@ -8658,13 +8638,6 @@
   <p:clrMapOvr>
     <a:masterClrMapping/>
   </p:clrMapOvr>
-  <p:timing>
-    <p:tnLst>
-      <p:par>
-        <p:cTn id="1" dur="indefinite" restart="never" nodeType="tmRoot"/>
-      </p:par>
-    </p:tnLst>
-  </p:timing>
 </p:sld>
 </file>
 
@@ -8690,7 +8663,7 @@
           <p:cNvPr id="2" name="Título 1">
             <a:extLst>
               <a:ext uri="{FF2B5EF4-FFF2-40B4-BE49-F238E27FC236}">
-                <a16:creationId xmlns:a16="http://schemas.microsoft.com/office/drawing/2014/main" xmlns="" id="{1876A212-EF96-EA5E-7FBB-0769B8C1F996}"/>
+                <a16:creationId xmlns:a16="http://schemas.microsoft.com/office/drawing/2014/main" id="{1876A212-EF96-EA5E-7FBB-0769B8C1F996}"/>
               </a:ext>
             </a:extLst>
           </p:cNvPr>
@@ -8712,18 +8685,9 @@
           <a:lstStyle/>
           <a:p>
             <a:r>
-              <a:rPr lang="pt-BR" dirty="0" smtClean="0"/>
-              <a:t>Encontrando </a:t>
-            </a:r>
-            <a:r>
               <a:rPr lang="pt-BR" dirty="0"/>
-              <a:t>o grau do polinômio aproximador com </a:t>
-            </a:r>
-            <a:r>
-              <a:rPr lang="pt-BR" dirty="0" smtClean="0"/>
-              <a:t>validação cruzada</a:t>
-            </a:r>
-            <a:endParaRPr lang="pt-BR" dirty="0"/>
+              <a:t>Encontrando o grau do polinômio aproximador com validação cruzada</a:t>
+            </a:r>
           </a:p>
         </p:txBody>
       </p:sp>
@@ -8734,7 +8698,7 @@
               <p:cNvPr id="3" name="Espaço Reservado para Conteúdo 2">
                 <a:extLst>
                   <a:ext uri="{FF2B5EF4-FFF2-40B4-BE49-F238E27FC236}">
-                    <a16:creationId xmlns:a16="http://schemas.microsoft.com/office/drawing/2014/main" xmlns="" id="{782C0558-FE85-A571-6C51-C40B36B884B3}"/>
+                    <a16:creationId xmlns:a16="http://schemas.microsoft.com/office/drawing/2014/main" id="{782C0558-FE85-A571-6C51-C40B36B884B3}"/>
                   </a:ext>
                 </a:extLst>
               </p:cNvPr>
@@ -9057,7 +9021,7 @@
           <p:cNvPr id="1026" name="Picture 2">
             <a:extLst>
               <a:ext uri="{FF2B5EF4-FFF2-40B4-BE49-F238E27FC236}">
-                <a16:creationId xmlns:a16="http://schemas.microsoft.com/office/drawing/2014/main" xmlns="" id="{F008AD83-55D8-BB3D-574B-2DDF5BA103C2}"/>
+                <a16:creationId xmlns:a16="http://schemas.microsoft.com/office/drawing/2014/main" id="{F008AD83-55D8-BB3D-574B-2DDF5BA103C2}"/>
               </a:ext>
             </a:extLst>
           </p:cNvPr>
@@ -9104,7 +9068,7 @@
           <p:cNvPr id="6" name="Rectangle 5">
             <a:extLst>
               <a:ext uri="{FF2B5EF4-FFF2-40B4-BE49-F238E27FC236}">
-                <a16:creationId xmlns:a16="http://schemas.microsoft.com/office/drawing/2014/main" xmlns="" id="{DEB643DB-8C0B-EF1B-48F4-62B1397ABCBD}"/>
+                <a16:creationId xmlns:a16="http://schemas.microsoft.com/office/drawing/2014/main" id="{DEB643DB-8C0B-EF1B-48F4-62B1397ABCBD}"/>
               </a:ext>
             </a:extLst>
           </p:cNvPr>
@@ -9153,13 +9117,6 @@
   <p:clrMapOvr>
     <a:masterClrMapping/>
   </p:clrMapOvr>
-  <p:timing>
-    <p:tnLst>
-      <p:par>
-        <p:cTn id="1" dur="indefinite" restart="never" nodeType="tmRoot"/>
-      </p:par>
-    </p:tnLst>
-  </p:timing>
 </p:sld>
 </file>
 
@@ -9185,7 +9142,7 @@
           <p:cNvPr id="2" name="Título 1">
             <a:extLst>
               <a:ext uri="{FF2B5EF4-FFF2-40B4-BE49-F238E27FC236}">
-                <a16:creationId xmlns:a16="http://schemas.microsoft.com/office/drawing/2014/main" xmlns="" id="{03A90728-D6F2-D90A-977C-52C5377EB8D9}"/>
+                <a16:creationId xmlns:a16="http://schemas.microsoft.com/office/drawing/2014/main" id="{03A90728-D6F2-D90A-977C-52C5377EB8D9}"/>
               </a:ext>
             </a:extLst>
           </p:cNvPr>
@@ -9215,7 +9172,7 @@
               <p:cNvPr id="3" name="Espaço Reservado para Conteúdo 2">
                 <a:extLst>
                   <a:ext uri="{FF2B5EF4-FFF2-40B4-BE49-F238E27FC236}">
-                    <a16:creationId xmlns:a16="http://schemas.microsoft.com/office/drawing/2014/main" xmlns="" id="{669B1AC1-E860-DDCC-28D4-468A7D4571A1}"/>
+                    <a16:creationId xmlns:a16="http://schemas.microsoft.com/office/drawing/2014/main" id="{669B1AC1-E860-DDCC-28D4-468A7D4571A1}"/>
                   </a:ext>
                 </a:extLst>
               </p:cNvPr>
@@ -9400,7 +9357,7 @@
           <p:cNvPr id="1026" name="Picture 2">
             <a:extLst>
               <a:ext uri="{FF2B5EF4-FFF2-40B4-BE49-F238E27FC236}">
-                <a16:creationId xmlns:a16="http://schemas.microsoft.com/office/drawing/2014/main" xmlns="" id="{4F75ACCB-B9A7-06FB-FE2D-CBB76CA16EBD}"/>
+                <a16:creationId xmlns:a16="http://schemas.microsoft.com/office/drawing/2014/main" id="{4F75ACCB-B9A7-06FB-FE2D-CBB76CA16EBD}"/>
               </a:ext>
             </a:extLst>
           </p:cNvPr>
@@ -9447,7 +9404,7 @@
           <p:cNvPr id="4" name="TextBox 10">
             <a:extLst>
               <a:ext uri="{FF2B5EF4-FFF2-40B4-BE49-F238E27FC236}">
-                <a16:creationId xmlns:a16="http://schemas.microsoft.com/office/drawing/2014/main" xmlns="" id="{F6ED7AC7-492A-4B4C-ACE9-E25912422FBD}"/>
+                <a16:creationId xmlns:a16="http://schemas.microsoft.com/office/drawing/2014/main" id="{F6ED7AC7-492A-4B4C-ACE9-E25912422FBD}"/>
               </a:ext>
             </a:extLst>
           </p:cNvPr>
@@ -9483,7 +9440,7 @@
           <p:cNvPr id="5" name="Straight Arrow Connector 12">
             <a:extLst>
               <a:ext uri="{FF2B5EF4-FFF2-40B4-BE49-F238E27FC236}">
-                <a16:creationId xmlns:a16="http://schemas.microsoft.com/office/drawing/2014/main" xmlns="" id="{9D06FFF8-E11B-764F-BA62-7395A1C463C7}"/>
+                <a16:creationId xmlns:a16="http://schemas.microsoft.com/office/drawing/2014/main" id="{9D06FFF8-E11B-764F-BA62-7395A1C463C7}"/>
               </a:ext>
             </a:extLst>
           </p:cNvPr>
@@ -9528,7 +9485,7 @@
           <p:cNvPr id="6" name="TextBox 14">
             <a:extLst>
               <a:ext uri="{FF2B5EF4-FFF2-40B4-BE49-F238E27FC236}">
-                <a16:creationId xmlns:a16="http://schemas.microsoft.com/office/drawing/2014/main" xmlns="" id="{DFC05649-0887-99DD-9BAB-C5E24BB47EAE}"/>
+                <a16:creationId xmlns:a16="http://schemas.microsoft.com/office/drawing/2014/main" id="{DFC05649-0887-99DD-9BAB-C5E24BB47EAE}"/>
               </a:ext>
             </a:extLst>
           </p:cNvPr>
@@ -9564,7 +9521,7 @@
           <p:cNvPr id="9" name="Straight Arrow Connector 20">
             <a:extLst>
               <a:ext uri="{FF2B5EF4-FFF2-40B4-BE49-F238E27FC236}">
-                <a16:creationId xmlns:a16="http://schemas.microsoft.com/office/drawing/2014/main" xmlns="" id="{85DE8C23-0176-65EA-13BF-724F7A54BEAE}"/>
+                <a16:creationId xmlns:a16="http://schemas.microsoft.com/office/drawing/2014/main" id="{85DE8C23-0176-65EA-13BF-724F7A54BEAE}"/>
               </a:ext>
             </a:extLst>
           </p:cNvPr>
@@ -9610,7 +9567,7 @@
           <p:cNvPr id="10" name="TextBox 22">
             <a:extLst>
               <a:ext uri="{FF2B5EF4-FFF2-40B4-BE49-F238E27FC236}">
-                <a16:creationId xmlns:a16="http://schemas.microsoft.com/office/drawing/2014/main" xmlns="" id="{21C7FE49-670C-A877-60B0-26555B2E8752}"/>
+                <a16:creationId xmlns:a16="http://schemas.microsoft.com/office/drawing/2014/main" id="{21C7FE49-670C-A877-60B0-26555B2E8752}"/>
               </a:ext>
             </a:extLst>
           </p:cNvPr>
@@ -9653,7 +9610,7 @@
           <p:cNvPr id="11" name="Straight Arrow Connector 23">
             <a:extLst>
               <a:ext uri="{FF2B5EF4-FFF2-40B4-BE49-F238E27FC236}">
-                <a16:creationId xmlns:a16="http://schemas.microsoft.com/office/drawing/2014/main" xmlns="" id="{E8E08E76-555D-EE74-8100-102DA56B409C}"/>
+                <a16:creationId xmlns:a16="http://schemas.microsoft.com/office/drawing/2014/main" id="{E8E08E76-555D-EE74-8100-102DA56B409C}"/>
               </a:ext>
             </a:extLst>
           </p:cNvPr>
@@ -9698,7 +9655,7 @@
           <p:cNvPr id="15" name="Forma Livre: Forma 14">
             <a:extLst>
               <a:ext uri="{FF2B5EF4-FFF2-40B4-BE49-F238E27FC236}">
-                <a16:creationId xmlns:a16="http://schemas.microsoft.com/office/drawing/2014/main" xmlns="" id="{9E53E231-5C1C-3A00-F067-646931B4BE3A}"/>
+                <a16:creationId xmlns:a16="http://schemas.microsoft.com/office/drawing/2014/main" id="{9E53E231-5C1C-3A00-F067-646931B4BE3A}"/>
               </a:ext>
             </a:extLst>
           </p:cNvPr>
@@ -9801,7 +9758,7 @@
           <p:cNvPr id="22" name="Retângulo 21">
             <a:extLst>
               <a:ext uri="{FF2B5EF4-FFF2-40B4-BE49-F238E27FC236}">
-                <a16:creationId xmlns:a16="http://schemas.microsoft.com/office/drawing/2014/main" xmlns="" id="{53B1DBD9-4EB3-219D-8E97-C76C0029AE7D}"/>
+                <a16:creationId xmlns:a16="http://schemas.microsoft.com/office/drawing/2014/main" id="{53B1DBD9-4EB3-219D-8E97-C76C0029AE7D}"/>
               </a:ext>
             </a:extLst>
           </p:cNvPr>
@@ -9853,7 +9810,7 @@
           <p:cNvPr id="23" name="Retângulo 22">
             <a:extLst>
               <a:ext uri="{FF2B5EF4-FFF2-40B4-BE49-F238E27FC236}">
-                <a16:creationId xmlns:a16="http://schemas.microsoft.com/office/drawing/2014/main" xmlns="" id="{BA83E3AA-7D83-81CA-AE38-903200A06C12}"/>
+                <a16:creationId xmlns:a16="http://schemas.microsoft.com/office/drawing/2014/main" id="{BA83E3AA-7D83-81CA-AE38-903200A06C12}"/>
               </a:ext>
             </a:extLst>
           </p:cNvPr>
@@ -9905,7 +9862,7 @@
           <p:cNvPr id="26" name="TextBox 22">
             <a:extLst>
               <a:ext uri="{FF2B5EF4-FFF2-40B4-BE49-F238E27FC236}">
-                <a16:creationId xmlns:a16="http://schemas.microsoft.com/office/drawing/2014/main" xmlns="" id="{9330585D-14BF-7E13-B2EB-4C15A4BE05AE}"/>
+                <a16:creationId xmlns:a16="http://schemas.microsoft.com/office/drawing/2014/main" id="{9330585D-14BF-7E13-B2EB-4C15A4BE05AE}"/>
               </a:ext>
             </a:extLst>
           </p:cNvPr>
@@ -9941,7 +9898,7 @@
           <p:cNvPr id="27" name="Straight Arrow Connector 20">
             <a:extLst>
               <a:ext uri="{FF2B5EF4-FFF2-40B4-BE49-F238E27FC236}">
-                <a16:creationId xmlns:a16="http://schemas.microsoft.com/office/drawing/2014/main" xmlns="" id="{3870277B-00D6-2B3C-EDD2-1EF26434A34C}"/>
+                <a16:creationId xmlns:a16="http://schemas.microsoft.com/office/drawing/2014/main" id="{3870277B-00D6-2B3C-EDD2-1EF26434A34C}"/>
               </a:ext>
             </a:extLst>
           </p:cNvPr>
@@ -9986,7 +9943,7 @@
           <p:cNvPr id="38" name="Elipse 37">
             <a:extLst>
               <a:ext uri="{FF2B5EF4-FFF2-40B4-BE49-F238E27FC236}">
-                <a16:creationId xmlns:a16="http://schemas.microsoft.com/office/drawing/2014/main" xmlns="" id="{32FAEE76-DC75-7820-EEFD-1A83FA6A51B6}"/>
+                <a16:creationId xmlns:a16="http://schemas.microsoft.com/office/drawing/2014/main" id="{32FAEE76-DC75-7820-EEFD-1A83FA6A51B6}"/>
               </a:ext>
             </a:extLst>
           </p:cNvPr>
@@ -10040,7 +9997,7 @@
           <p:cNvPr id="43" name="Straight Arrow Connector 20">
             <a:extLst>
               <a:ext uri="{FF2B5EF4-FFF2-40B4-BE49-F238E27FC236}">
-                <a16:creationId xmlns:a16="http://schemas.microsoft.com/office/drawing/2014/main" xmlns="" id="{1B1A462D-D45C-D498-E3C0-3187715590DD}"/>
+                <a16:creationId xmlns:a16="http://schemas.microsoft.com/office/drawing/2014/main" id="{1B1A462D-D45C-D498-E3C0-3187715590DD}"/>
               </a:ext>
             </a:extLst>
           </p:cNvPr>
@@ -10085,7 +10042,7 @@
           <p:cNvPr id="7" name="Chave Direita 6">
             <a:extLst>
               <a:ext uri="{FF2B5EF4-FFF2-40B4-BE49-F238E27FC236}">
-                <a16:creationId xmlns:a16="http://schemas.microsoft.com/office/drawing/2014/main" xmlns="" id="{75F5F5AA-95E3-C286-36F8-662E3D7CFD67}"/>
+                <a16:creationId xmlns:a16="http://schemas.microsoft.com/office/drawing/2014/main" id="{75F5F5AA-95E3-C286-36F8-662E3D7CFD67}"/>
               </a:ext>
             </a:extLst>
           </p:cNvPr>
@@ -10129,7 +10086,7 @@
           <p:cNvPr id="12" name="CaixaDeTexto 11">
             <a:extLst>
               <a:ext uri="{FF2B5EF4-FFF2-40B4-BE49-F238E27FC236}">
-                <a16:creationId xmlns:a16="http://schemas.microsoft.com/office/drawing/2014/main" xmlns="" id="{01ED7978-D805-7BA6-7934-6EA3F984FAFF}"/>
+                <a16:creationId xmlns:a16="http://schemas.microsoft.com/office/drawing/2014/main" id="{01ED7978-D805-7BA6-7934-6EA3F984FAFF}"/>
               </a:ext>
             </a:extLst>
           </p:cNvPr>
@@ -10165,7 +10122,7 @@
           <p:cNvPr id="13" name="Chave Direita 12">
             <a:extLst>
               <a:ext uri="{FF2B5EF4-FFF2-40B4-BE49-F238E27FC236}">
-                <a16:creationId xmlns:a16="http://schemas.microsoft.com/office/drawing/2014/main" xmlns="" id="{549A8137-0814-3951-63B8-D80836E1DFF1}"/>
+                <a16:creationId xmlns:a16="http://schemas.microsoft.com/office/drawing/2014/main" id="{549A8137-0814-3951-63B8-D80836E1DFF1}"/>
               </a:ext>
             </a:extLst>
           </p:cNvPr>
@@ -10209,7 +10166,7 @@
           <p:cNvPr id="14" name="CaixaDeTexto 13">
             <a:extLst>
               <a:ext uri="{FF2B5EF4-FFF2-40B4-BE49-F238E27FC236}">
-                <a16:creationId xmlns:a16="http://schemas.microsoft.com/office/drawing/2014/main" xmlns="" id="{24F7BAAC-DF5F-E21B-535A-AAC9CB256771}"/>
+                <a16:creationId xmlns:a16="http://schemas.microsoft.com/office/drawing/2014/main" id="{24F7BAAC-DF5F-E21B-535A-AAC9CB256771}"/>
               </a:ext>
             </a:extLst>
           </p:cNvPr>
@@ -10245,7 +10202,7 @@
           <p:cNvPr id="17" name="Chave Direita 16">
             <a:extLst>
               <a:ext uri="{FF2B5EF4-FFF2-40B4-BE49-F238E27FC236}">
-                <a16:creationId xmlns:a16="http://schemas.microsoft.com/office/drawing/2014/main" xmlns="" id="{C7A0A6A0-4890-8267-254B-135D8446CC30}"/>
+                <a16:creationId xmlns:a16="http://schemas.microsoft.com/office/drawing/2014/main" id="{C7A0A6A0-4890-8267-254B-135D8446CC30}"/>
               </a:ext>
             </a:extLst>
           </p:cNvPr>
@@ -10289,7 +10246,7 @@
           <p:cNvPr id="18" name="CaixaDeTexto 17">
             <a:extLst>
               <a:ext uri="{FF2B5EF4-FFF2-40B4-BE49-F238E27FC236}">
-                <a16:creationId xmlns:a16="http://schemas.microsoft.com/office/drawing/2014/main" xmlns="" id="{A0F21959-8E8C-6CB7-088A-AF3583AB7984}"/>
+                <a16:creationId xmlns:a16="http://schemas.microsoft.com/office/drawing/2014/main" id="{A0F21959-8E8C-6CB7-088A-AF3583AB7984}"/>
               </a:ext>
             </a:extLst>
           </p:cNvPr>
@@ -10330,13 +10287,6 @@
   <p:clrMapOvr>
     <a:masterClrMapping/>
   </p:clrMapOvr>
-  <p:timing>
-    <p:tnLst>
-      <p:par>
-        <p:cTn id="1" dur="indefinite" restart="never" nodeType="tmRoot"/>
-      </p:par>
-    </p:tnLst>
-  </p:timing>
 </p:sld>
 </file>
 
@@ -10364,7 +10314,7 @@
               <p:cNvPr id="2" name="Título 1">
                 <a:extLst>
                   <a:ext uri="{FF2B5EF4-FFF2-40B4-BE49-F238E27FC236}">
-                    <a16:creationId xmlns:a16="http://schemas.microsoft.com/office/drawing/2014/main" xmlns="" id="{03A90728-D6F2-D90A-977C-52C5377EB8D9}"/>
+                    <a16:creationId xmlns:a16="http://schemas.microsoft.com/office/drawing/2014/main" id="{03A90728-D6F2-D90A-977C-52C5377EB8D9}"/>
                   </a:ext>
                 </a:extLst>
               </p:cNvPr>
@@ -10459,7 +10409,7 @@
           <p:cNvPr id="3" name="Espaço Reservado para Conteúdo 2">
             <a:extLst>
               <a:ext uri="{FF2B5EF4-FFF2-40B4-BE49-F238E27FC236}">
-                <a16:creationId xmlns:a16="http://schemas.microsoft.com/office/drawing/2014/main" xmlns="" id="{669B1AC1-E860-DDCC-28D4-468A7D4571A1}"/>
+                <a16:creationId xmlns:a16="http://schemas.microsoft.com/office/drawing/2014/main" id="{669B1AC1-E860-DDCC-28D4-468A7D4571A1}"/>
               </a:ext>
             </a:extLst>
           </p:cNvPr>
@@ -10588,7 +10538,7 @@
           <p:cNvPr id="5" name="Picture 2">
             <a:extLst>
               <a:ext uri="{FF2B5EF4-FFF2-40B4-BE49-F238E27FC236}">
-                <a16:creationId xmlns:a16="http://schemas.microsoft.com/office/drawing/2014/main" xmlns="" id="{2BD4A147-EF73-8CFE-520C-857F9BFD51F7}"/>
+                <a16:creationId xmlns:a16="http://schemas.microsoft.com/office/drawing/2014/main" id="{2BD4A147-EF73-8CFE-520C-857F9BFD51F7}"/>
               </a:ext>
             </a:extLst>
           </p:cNvPr>
@@ -10633,7 +10583,7 @@
           <p:cNvPr id="6" name="Straight Arrow Connector 12">
             <a:extLst>
               <a:ext uri="{FF2B5EF4-FFF2-40B4-BE49-F238E27FC236}">
-                <a16:creationId xmlns:a16="http://schemas.microsoft.com/office/drawing/2014/main" xmlns="" id="{D0F3B5DC-31A3-8D2C-8C7C-2DC61D16638A}"/>
+                <a16:creationId xmlns:a16="http://schemas.microsoft.com/office/drawing/2014/main" id="{D0F3B5DC-31A3-8D2C-8C7C-2DC61D16638A}"/>
               </a:ext>
             </a:extLst>
           </p:cNvPr>
@@ -10678,7 +10628,7 @@
           <p:cNvPr id="7" name="TextBox 14">
             <a:extLst>
               <a:ext uri="{FF2B5EF4-FFF2-40B4-BE49-F238E27FC236}">
-                <a16:creationId xmlns:a16="http://schemas.microsoft.com/office/drawing/2014/main" xmlns="" id="{02D5EF9F-87A8-C253-A91A-C91117FF2EBA}"/>
+                <a16:creationId xmlns:a16="http://schemas.microsoft.com/office/drawing/2014/main" id="{02D5EF9F-87A8-C253-A91A-C91117FF2EBA}"/>
               </a:ext>
             </a:extLst>
           </p:cNvPr>
@@ -10714,7 +10664,7 @@
           <p:cNvPr id="8" name="Forma Livre: Forma 7">
             <a:extLst>
               <a:ext uri="{FF2B5EF4-FFF2-40B4-BE49-F238E27FC236}">
-                <a16:creationId xmlns:a16="http://schemas.microsoft.com/office/drawing/2014/main" xmlns="" id="{FCAE0EED-8EC9-F8AA-9B0D-AF324E1A737C}"/>
+                <a16:creationId xmlns:a16="http://schemas.microsoft.com/office/drawing/2014/main" id="{FCAE0EED-8EC9-F8AA-9B0D-AF324E1A737C}"/>
               </a:ext>
             </a:extLst>
           </p:cNvPr>
@@ -10817,7 +10767,7 @@
           <p:cNvPr id="9" name="Forma Livre: Forma 8">
             <a:extLst>
               <a:ext uri="{FF2B5EF4-FFF2-40B4-BE49-F238E27FC236}">
-                <a16:creationId xmlns:a16="http://schemas.microsoft.com/office/drawing/2014/main" xmlns="" id="{E48383E7-8BAE-25AF-5DDF-4092A4398697}"/>
+                <a16:creationId xmlns:a16="http://schemas.microsoft.com/office/drawing/2014/main" id="{E48383E7-8BAE-25AF-5DDF-4092A4398697}"/>
               </a:ext>
             </a:extLst>
           </p:cNvPr>
@@ -10920,7 +10870,7 @@
           <p:cNvPr id="12" name="Straight Arrow Connector 12">
             <a:extLst>
               <a:ext uri="{FF2B5EF4-FFF2-40B4-BE49-F238E27FC236}">
-                <a16:creationId xmlns:a16="http://schemas.microsoft.com/office/drawing/2014/main" xmlns="" id="{4C7F3FA9-99F7-BEC5-727B-A718AEF9B4CB}"/>
+                <a16:creationId xmlns:a16="http://schemas.microsoft.com/office/drawing/2014/main" id="{4C7F3FA9-99F7-BEC5-727B-A718AEF9B4CB}"/>
               </a:ext>
             </a:extLst>
           </p:cNvPr>
@@ -10965,7 +10915,7 @@
           <p:cNvPr id="17" name="TextBox 10">
             <a:extLst>
               <a:ext uri="{FF2B5EF4-FFF2-40B4-BE49-F238E27FC236}">
-                <a16:creationId xmlns:a16="http://schemas.microsoft.com/office/drawing/2014/main" xmlns="" id="{0CDD3602-CF5A-23FD-62BC-7FB0BEE313C7}"/>
+                <a16:creationId xmlns:a16="http://schemas.microsoft.com/office/drawing/2014/main" id="{0CDD3602-CF5A-23FD-62BC-7FB0BEE313C7}"/>
               </a:ext>
             </a:extLst>
           </p:cNvPr>
@@ -11001,7 +10951,7 @@
           <p:cNvPr id="18" name="Straight Arrow Connector 23">
             <a:extLst>
               <a:ext uri="{FF2B5EF4-FFF2-40B4-BE49-F238E27FC236}">
-                <a16:creationId xmlns:a16="http://schemas.microsoft.com/office/drawing/2014/main" xmlns="" id="{DE17E922-2892-96C7-7B60-5E236B0D2F8D}"/>
+                <a16:creationId xmlns:a16="http://schemas.microsoft.com/office/drawing/2014/main" id="{DE17E922-2892-96C7-7B60-5E236B0D2F8D}"/>
               </a:ext>
             </a:extLst>
           </p:cNvPr>
@@ -11047,7 +10997,7 @@
           <p:cNvPr id="19" name="Retângulo 18">
             <a:extLst>
               <a:ext uri="{FF2B5EF4-FFF2-40B4-BE49-F238E27FC236}">
-                <a16:creationId xmlns:a16="http://schemas.microsoft.com/office/drawing/2014/main" xmlns="" id="{49131EDC-5909-D462-D5A1-129C0FF2524D}"/>
+                <a16:creationId xmlns:a16="http://schemas.microsoft.com/office/drawing/2014/main" id="{49131EDC-5909-D462-D5A1-129C0FF2524D}"/>
               </a:ext>
             </a:extLst>
           </p:cNvPr>
@@ -11099,7 +11049,7 @@
           <p:cNvPr id="24" name="TextBox 22">
             <a:extLst>
               <a:ext uri="{FF2B5EF4-FFF2-40B4-BE49-F238E27FC236}">
-                <a16:creationId xmlns:a16="http://schemas.microsoft.com/office/drawing/2014/main" xmlns="" id="{B96D6B38-6850-F44F-0025-0EDEF23300F9}"/>
+                <a16:creationId xmlns:a16="http://schemas.microsoft.com/office/drawing/2014/main" id="{B96D6B38-6850-F44F-0025-0EDEF23300F9}"/>
               </a:ext>
             </a:extLst>
           </p:cNvPr>
@@ -11142,7 +11092,7 @@
           <p:cNvPr id="25" name="Straight Arrow Connector 20">
             <a:extLst>
               <a:ext uri="{FF2B5EF4-FFF2-40B4-BE49-F238E27FC236}">
-                <a16:creationId xmlns:a16="http://schemas.microsoft.com/office/drawing/2014/main" xmlns="" id="{879EDE20-5CAF-8100-D5BF-51521099D6CD}"/>
+                <a16:creationId xmlns:a16="http://schemas.microsoft.com/office/drawing/2014/main" id="{879EDE20-5CAF-8100-D5BF-51521099D6CD}"/>
               </a:ext>
             </a:extLst>
           </p:cNvPr>
@@ -11188,7 +11138,7 @@
           <p:cNvPr id="26" name="Elipse 25">
             <a:extLst>
               <a:ext uri="{FF2B5EF4-FFF2-40B4-BE49-F238E27FC236}">
-                <a16:creationId xmlns:a16="http://schemas.microsoft.com/office/drawing/2014/main" xmlns="" id="{6D56B0E5-A8FF-7E40-8460-2B13D63D3BA3}"/>
+                <a16:creationId xmlns:a16="http://schemas.microsoft.com/office/drawing/2014/main" id="{6D56B0E5-A8FF-7E40-8460-2B13D63D3BA3}"/>
               </a:ext>
             </a:extLst>
           </p:cNvPr>
@@ -11242,7 +11192,7 @@
           <p:cNvPr id="27" name="Straight Arrow Connector 20">
             <a:extLst>
               <a:ext uri="{FF2B5EF4-FFF2-40B4-BE49-F238E27FC236}">
-                <a16:creationId xmlns:a16="http://schemas.microsoft.com/office/drawing/2014/main" xmlns="" id="{1E7A1D7F-3503-5761-5F27-025E7FD0E449}"/>
+                <a16:creationId xmlns:a16="http://schemas.microsoft.com/office/drawing/2014/main" id="{1E7A1D7F-3503-5761-5F27-025E7FD0E449}"/>
               </a:ext>
             </a:extLst>
           </p:cNvPr>
@@ -11287,7 +11237,7 @@
           <p:cNvPr id="34" name="Elipse 33">
             <a:extLst>
               <a:ext uri="{FF2B5EF4-FFF2-40B4-BE49-F238E27FC236}">
-                <a16:creationId xmlns:a16="http://schemas.microsoft.com/office/drawing/2014/main" xmlns="" id="{5AF258B0-FD3B-872E-D235-5BE67CEDAD9D}"/>
+                <a16:creationId xmlns:a16="http://schemas.microsoft.com/office/drawing/2014/main" id="{5AF258B0-FD3B-872E-D235-5BE67CEDAD9D}"/>
               </a:ext>
             </a:extLst>
           </p:cNvPr>
@@ -11341,7 +11291,7 @@
           <p:cNvPr id="35" name="Straight Arrow Connector 20">
             <a:extLst>
               <a:ext uri="{FF2B5EF4-FFF2-40B4-BE49-F238E27FC236}">
-                <a16:creationId xmlns:a16="http://schemas.microsoft.com/office/drawing/2014/main" xmlns="" id="{BF43D4F4-26E6-4051-8E1C-6114F7E93C29}"/>
+                <a16:creationId xmlns:a16="http://schemas.microsoft.com/office/drawing/2014/main" id="{BF43D4F4-26E6-4051-8E1C-6114F7E93C29}"/>
               </a:ext>
             </a:extLst>
           </p:cNvPr>
@@ -11387,7 +11337,7 @@
           <p:cNvPr id="38" name="Straight Arrow Connector 20">
             <a:extLst>
               <a:ext uri="{FF2B5EF4-FFF2-40B4-BE49-F238E27FC236}">
-                <a16:creationId xmlns:a16="http://schemas.microsoft.com/office/drawing/2014/main" xmlns="" id="{1F0EC925-A6E7-79E8-A06A-10AA6657ED1D}"/>
+                <a16:creationId xmlns:a16="http://schemas.microsoft.com/office/drawing/2014/main" id="{1F0EC925-A6E7-79E8-A06A-10AA6657ED1D}"/>
               </a:ext>
             </a:extLst>
           </p:cNvPr>
@@ -11431,7 +11381,7 @@
           <p:cNvPr id="4" name="Chave Direita 3">
             <a:extLst>
               <a:ext uri="{FF2B5EF4-FFF2-40B4-BE49-F238E27FC236}">
-                <a16:creationId xmlns:a16="http://schemas.microsoft.com/office/drawing/2014/main" xmlns="" id="{50AB61A5-FFC0-0944-17C9-F089F1EBE723}"/>
+                <a16:creationId xmlns:a16="http://schemas.microsoft.com/office/drawing/2014/main" id="{50AB61A5-FFC0-0944-17C9-F089F1EBE723}"/>
               </a:ext>
             </a:extLst>
           </p:cNvPr>
@@ -11475,7 +11425,7 @@
           <p:cNvPr id="10" name="CaixaDeTexto 9">
             <a:extLst>
               <a:ext uri="{FF2B5EF4-FFF2-40B4-BE49-F238E27FC236}">
-                <a16:creationId xmlns:a16="http://schemas.microsoft.com/office/drawing/2014/main" xmlns="" id="{A931A248-07FE-7E04-63A4-9180F57FE5D6}"/>
+                <a16:creationId xmlns:a16="http://schemas.microsoft.com/office/drawing/2014/main" id="{A931A248-07FE-7E04-63A4-9180F57FE5D6}"/>
               </a:ext>
             </a:extLst>
           </p:cNvPr>
@@ -11511,7 +11461,7 @@
           <p:cNvPr id="11" name="Chave Direita 10">
             <a:extLst>
               <a:ext uri="{FF2B5EF4-FFF2-40B4-BE49-F238E27FC236}">
-                <a16:creationId xmlns:a16="http://schemas.microsoft.com/office/drawing/2014/main" xmlns="" id="{59B217F5-F90C-2D71-BE21-E1427C65F9CD}"/>
+                <a16:creationId xmlns:a16="http://schemas.microsoft.com/office/drawing/2014/main" id="{59B217F5-F90C-2D71-BE21-E1427C65F9CD}"/>
               </a:ext>
             </a:extLst>
           </p:cNvPr>
@@ -11555,7 +11505,7 @@
           <p:cNvPr id="13" name="CaixaDeTexto 12">
             <a:extLst>
               <a:ext uri="{FF2B5EF4-FFF2-40B4-BE49-F238E27FC236}">
-                <a16:creationId xmlns:a16="http://schemas.microsoft.com/office/drawing/2014/main" xmlns="" id="{7F00A093-999D-6747-64FB-250BFDD3FD03}"/>
+                <a16:creationId xmlns:a16="http://schemas.microsoft.com/office/drawing/2014/main" id="{7F00A093-999D-6747-64FB-250BFDD3FD03}"/>
               </a:ext>
             </a:extLst>
           </p:cNvPr>
@@ -11593,7 +11543,7 @@
               <p:cNvPr id="15" name="CaixaDeTexto 14">
                 <a:extLst>
                   <a:ext uri="{FF2B5EF4-FFF2-40B4-BE49-F238E27FC236}">
-                    <a16:creationId xmlns:a16="http://schemas.microsoft.com/office/drawing/2014/main" xmlns="" id="{FAA77714-4F7B-8208-C15D-F28B3B953CFC}"/>
+                    <a16:creationId xmlns:a16="http://schemas.microsoft.com/office/drawing/2014/main" id="{FAA77714-4F7B-8208-C15D-F28B3B953CFC}"/>
                   </a:ext>
                 </a:extLst>
               </p:cNvPr>
@@ -11763,7 +11713,7 @@
               <p:cNvPr id="2" name="Título 1">
                 <a:extLst>
                   <a:ext uri="{FF2B5EF4-FFF2-40B4-BE49-F238E27FC236}">
-                    <a16:creationId xmlns:a16="http://schemas.microsoft.com/office/drawing/2014/main" xmlns="" id="{03A90728-D6F2-D90A-977C-52C5377EB8D9}"/>
+                    <a16:creationId xmlns:a16="http://schemas.microsoft.com/office/drawing/2014/main" id="{03A90728-D6F2-D90A-977C-52C5377EB8D9}"/>
                   </a:ext>
                 </a:extLst>
               </p:cNvPr>
@@ -11858,7 +11808,7 @@
           <p:cNvPr id="3" name="Espaço Reservado para Conteúdo 2">
             <a:extLst>
               <a:ext uri="{FF2B5EF4-FFF2-40B4-BE49-F238E27FC236}">
-                <a16:creationId xmlns:a16="http://schemas.microsoft.com/office/drawing/2014/main" xmlns="" id="{669B1AC1-E860-DDCC-28D4-468A7D4571A1}"/>
+                <a16:creationId xmlns:a16="http://schemas.microsoft.com/office/drawing/2014/main" id="{669B1AC1-E860-DDCC-28D4-468A7D4571A1}"/>
               </a:ext>
             </a:extLst>
           </p:cNvPr>
@@ -12000,7 +11950,7 @@
           <p:cNvPr id="5" name="Picture 2">
             <a:extLst>
               <a:ext uri="{FF2B5EF4-FFF2-40B4-BE49-F238E27FC236}">
-                <a16:creationId xmlns:a16="http://schemas.microsoft.com/office/drawing/2014/main" xmlns="" id="{2BD4A147-EF73-8CFE-520C-857F9BFD51F7}"/>
+                <a16:creationId xmlns:a16="http://schemas.microsoft.com/office/drawing/2014/main" id="{2BD4A147-EF73-8CFE-520C-857F9BFD51F7}"/>
               </a:ext>
             </a:extLst>
           </p:cNvPr>
@@ -12045,7 +11995,7 @@
           <p:cNvPr id="6" name="Straight Arrow Connector 12">
             <a:extLst>
               <a:ext uri="{FF2B5EF4-FFF2-40B4-BE49-F238E27FC236}">
-                <a16:creationId xmlns:a16="http://schemas.microsoft.com/office/drawing/2014/main" xmlns="" id="{D0F3B5DC-31A3-8D2C-8C7C-2DC61D16638A}"/>
+                <a16:creationId xmlns:a16="http://schemas.microsoft.com/office/drawing/2014/main" id="{D0F3B5DC-31A3-8D2C-8C7C-2DC61D16638A}"/>
               </a:ext>
             </a:extLst>
           </p:cNvPr>
@@ -12090,7 +12040,7 @@
           <p:cNvPr id="7" name="TextBox 14">
             <a:extLst>
               <a:ext uri="{FF2B5EF4-FFF2-40B4-BE49-F238E27FC236}">
-                <a16:creationId xmlns:a16="http://schemas.microsoft.com/office/drawing/2014/main" xmlns="" id="{02D5EF9F-87A8-C253-A91A-C91117FF2EBA}"/>
+                <a16:creationId xmlns:a16="http://schemas.microsoft.com/office/drawing/2014/main" id="{02D5EF9F-87A8-C253-A91A-C91117FF2EBA}"/>
               </a:ext>
             </a:extLst>
           </p:cNvPr>
@@ -12126,7 +12076,7 @@
           <p:cNvPr id="8" name="Forma Livre: Forma 7">
             <a:extLst>
               <a:ext uri="{FF2B5EF4-FFF2-40B4-BE49-F238E27FC236}">
-                <a16:creationId xmlns:a16="http://schemas.microsoft.com/office/drawing/2014/main" xmlns="" id="{FCAE0EED-8EC9-F8AA-9B0D-AF324E1A737C}"/>
+                <a16:creationId xmlns:a16="http://schemas.microsoft.com/office/drawing/2014/main" id="{FCAE0EED-8EC9-F8AA-9B0D-AF324E1A737C}"/>
               </a:ext>
             </a:extLst>
           </p:cNvPr>
@@ -12229,7 +12179,7 @@
           <p:cNvPr id="9" name="Forma Livre: Forma 8">
             <a:extLst>
               <a:ext uri="{FF2B5EF4-FFF2-40B4-BE49-F238E27FC236}">
-                <a16:creationId xmlns:a16="http://schemas.microsoft.com/office/drawing/2014/main" xmlns="" id="{E48383E7-8BAE-25AF-5DDF-4092A4398697}"/>
+                <a16:creationId xmlns:a16="http://schemas.microsoft.com/office/drawing/2014/main" id="{E48383E7-8BAE-25AF-5DDF-4092A4398697}"/>
               </a:ext>
             </a:extLst>
           </p:cNvPr>
@@ -12332,7 +12282,7 @@
           <p:cNvPr id="12" name="Straight Arrow Connector 12">
             <a:extLst>
               <a:ext uri="{FF2B5EF4-FFF2-40B4-BE49-F238E27FC236}">
-                <a16:creationId xmlns:a16="http://schemas.microsoft.com/office/drawing/2014/main" xmlns="" id="{4C7F3FA9-99F7-BEC5-727B-A718AEF9B4CB}"/>
+                <a16:creationId xmlns:a16="http://schemas.microsoft.com/office/drawing/2014/main" id="{4C7F3FA9-99F7-BEC5-727B-A718AEF9B4CB}"/>
               </a:ext>
             </a:extLst>
           </p:cNvPr>
@@ -12377,7 +12327,7 @@
           <p:cNvPr id="17" name="TextBox 10">
             <a:extLst>
               <a:ext uri="{FF2B5EF4-FFF2-40B4-BE49-F238E27FC236}">
-                <a16:creationId xmlns:a16="http://schemas.microsoft.com/office/drawing/2014/main" xmlns="" id="{0CDD3602-CF5A-23FD-62BC-7FB0BEE313C7}"/>
+                <a16:creationId xmlns:a16="http://schemas.microsoft.com/office/drawing/2014/main" id="{0CDD3602-CF5A-23FD-62BC-7FB0BEE313C7}"/>
               </a:ext>
             </a:extLst>
           </p:cNvPr>
@@ -12413,7 +12363,7 @@
           <p:cNvPr id="18" name="Straight Arrow Connector 23">
             <a:extLst>
               <a:ext uri="{FF2B5EF4-FFF2-40B4-BE49-F238E27FC236}">
-                <a16:creationId xmlns:a16="http://schemas.microsoft.com/office/drawing/2014/main" xmlns="" id="{DE17E922-2892-96C7-7B60-5E236B0D2F8D}"/>
+                <a16:creationId xmlns:a16="http://schemas.microsoft.com/office/drawing/2014/main" id="{DE17E922-2892-96C7-7B60-5E236B0D2F8D}"/>
               </a:ext>
             </a:extLst>
           </p:cNvPr>
@@ -12459,7 +12409,7 @@
           <p:cNvPr id="19" name="Retângulo 18">
             <a:extLst>
               <a:ext uri="{FF2B5EF4-FFF2-40B4-BE49-F238E27FC236}">
-                <a16:creationId xmlns:a16="http://schemas.microsoft.com/office/drawing/2014/main" xmlns="" id="{49131EDC-5909-D462-D5A1-129C0FF2524D}"/>
+                <a16:creationId xmlns:a16="http://schemas.microsoft.com/office/drawing/2014/main" id="{49131EDC-5909-D462-D5A1-129C0FF2524D}"/>
               </a:ext>
             </a:extLst>
           </p:cNvPr>
@@ -12511,7 +12461,7 @@
           <p:cNvPr id="24" name="TextBox 22">
             <a:extLst>
               <a:ext uri="{FF2B5EF4-FFF2-40B4-BE49-F238E27FC236}">
-                <a16:creationId xmlns:a16="http://schemas.microsoft.com/office/drawing/2014/main" xmlns="" id="{B96D6B38-6850-F44F-0025-0EDEF23300F9}"/>
+                <a16:creationId xmlns:a16="http://schemas.microsoft.com/office/drawing/2014/main" id="{B96D6B38-6850-F44F-0025-0EDEF23300F9}"/>
               </a:ext>
             </a:extLst>
           </p:cNvPr>
@@ -12554,7 +12504,7 @@
           <p:cNvPr id="25" name="Straight Arrow Connector 20">
             <a:extLst>
               <a:ext uri="{FF2B5EF4-FFF2-40B4-BE49-F238E27FC236}">
-                <a16:creationId xmlns:a16="http://schemas.microsoft.com/office/drawing/2014/main" xmlns="" id="{879EDE20-5CAF-8100-D5BF-51521099D6CD}"/>
+                <a16:creationId xmlns:a16="http://schemas.microsoft.com/office/drawing/2014/main" id="{879EDE20-5CAF-8100-D5BF-51521099D6CD}"/>
               </a:ext>
             </a:extLst>
           </p:cNvPr>
@@ -12600,7 +12550,7 @@
           <p:cNvPr id="26" name="Elipse 25">
             <a:extLst>
               <a:ext uri="{FF2B5EF4-FFF2-40B4-BE49-F238E27FC236}">
-                <a16:creationId xmlns:a16="http://schemas.microsoft.com/office/drawing/2014/main" xmlns="" id="{6D56B0E5-A8FF-7E40-8460-2B13D63D3BA3}"/>
+                <a16:creationId xmlns:a16="http://schemas.microsoft.com/office/drawing/2014/main" id="{6D56B0E5-A8FF-7E40-8460-2B13D63D3BA3}"/>
               </a:ext>
             </a:extLst>
           </p:cNvPr>
@@ -12654,7 +12604,7 @@
           <p:cNvPr id="27" name="Straight Arrow Connector 20">
             <a:extLst>
               <a:ext uri="{FF2B5EF4-FFF2-40B4-BE49-F238E27FC236}">
-                <a16:creationId xmlns:a16="http://schemas.microsoft.com/office/drawing/2014/main" xmlns="" id="{1E7A1D7F-3503-5761-5F27-025E7FD0E449}"/>
+                <a16:creationId xmlns:a16="http://schemas.microsoft.com/office/drawing/2014/main" id="{1E7A1D7F-3503-5761-5F27-025E7FD0E449}"/>
               </a:ext>
             </a:extLst>
           </p:cNvPr>
@@ -12699,7 +12649,7 @@
           <p:cNvPr id="34" name="Elipse 33">
             <a:extLst>
               <a:ext uri="{FF2B5EF4-FFF2-40B4-BE49-F238E27FC236}">
-                <a16:creationId xmlns:a16="http://schemas.microsoft.com/office/drawing/2014/main" xmlns="" id="{5AF258B0-FD3B-872E-D235-5BE67CEDAD9D}"/>
+                <a16:creationId xmlns:a16="http://schemas.microsoft.com/office/drawing/2014/main" id="{5AF258B0-FD3B-872E-D235-5BE67CEDAD9D}"/>
               </a:ext>
             </a:extLst>
           </p:cNvPr>
@@ -12753,7 +12703,7 @@
           <p:cNvPr id="35" name="Straight Arrow Connector 20">
             <a:extLst>
               <a:ext uri="{FF2B5EF4-FFF2-40B4-BE49-F238E27FC236}">
-                <a16:creationId xmlns:a16="http://schemas.microsoft.com/office/drawing/2014/main" xmlns="" id="{BF43D4F4-26E6-4051-8E1C-6114F7E93C29}"/>
+                <a16:creationId xmlns:a16="http://schemas.microsoft.com/office/drawing/2014/main" id="{BF43D4F4-26E6-4051-8E1C-6114F7E93C29}"/>
               </a:ext>
             </a:extLst>
           </p:cNvPr>
@@ -12799,7 +12749,7 @@
           <p:cNvPr id="38" name="Straight Arrow Connector 20">
             <a:extLst>
               <a:ext uri="{FF2B5EF4-FFF2-40B4-BE49-F238E27FC236}">
-                <a16:creationId xmlns:a16="http://schemas.microsoft.com/office/drawing/2014/main" xmlns="" id="{1F0EC925-A6E7-79E8-A06A-10AA6657ED1D}"/>
+                <a16:creationId xmlns:a16="http://schemas.microsoft.com/office/drawing/2014/main" id="{1F0EC925-A6E7-79E8-A06A-10AA6657ED1D}"/>
               </a:ext>
             </a:extLst>
           </p:cNvPr>
@@ -12873,7 +12823,7 @@
           <p:cNvPr id="2" name="Título 1">
             <a:extLst>
               <a:ext uri="{FF2B5EF4-FFF2-40B4-BE49-F238E27FC236}">
-                <a16:creationId xmlns:a16="http://schemas.microsoft.com/office/drawing/2014/main" xmlns="" id="{A251A04E-87C2-A4B1-727E-ACB4C5801459}"/>
+                <a16:creationId xmlns:a16="http://schemas.microsoft.com/office/drawing/2014/main" id="{A251A04E-87C2-A4B1-727E-ACB4C5801459}"/>
               </a:ext>
             </a:extLst>
           </p:cNvPr>
@@ -12906,7 +12856,7 @@
           <p:cNvPr id="3" name="Espaço Reservado para Conteúdo 2">
             <a:extLst>
               <a:ext uri="{FF2B5EF4-FFF2-40B4-BE49-F238E27FC236}">
-                <a16:creationId xmlns:a16="http://schemas.microsoft.com/office/drawing/2014/main" xmlns="" id="{139ADDD6-6BAF-0757-3736-516A20794509}"/>
+                <a16:creationId xmlns:a16="http://schemas.microsoft.com/office/drawing/2014/main" id="{139ADDD6-6BAF-0757-3736-516A20794509}"/>
               </a:ext>
             </a:extLst>
           </p:cNvPr>
@@ -12993,7 +12943,7 @@
           <p:cNvPr id="4" name="Picture 2">
             <a:extLst>
               <a:ext uri="{FF2B5EF4-FFF2-40B4-BE49-F238E27FC236}">
-                <a16:creationId xmlns:a16="http://schemas.microsoft.com/office/drawing/2014/main" xmlns="" id="{F1523848-867A-3698-482D-51E11972A826}"/>
+                <a16:creationId xmlns:a16="http://schemas.microsoft.com/office/drawing/2014/main" id="{F1523848-867A-3698-482D-51E11972A826}"/>
               </a:ext>
             </a:extLst>
           </p:cNvPr>
@@ -13040,7 +12990,7 @@
           <p:cNvPr id="5" name="Picture 4">
             <a:extLst>
               <a:ext uri="{FF2B5EF4-FFF2-40B4-BE49-F238E27FC236}">
-                <a16:creationId xmlns:a16="http://schemas.microsoft.com/office/drawing/2014/main" xmlns="" id="{3006A038-21C6-0345-55DE-A2A30CC10D71}"/>
+                <a16:creationId xmlns:a16="http://schemas.microsoft.com/office/drawing/2014/main" id="{3006A038-21C6-0345-55DE-A2A30CC10D71}"/>
               </a:ext>
             </a:extLst>
           </p:cNvPr>
@@ -13087,7 +13037,7 @@
           <p:cNvPr id="6" name="CaixaDeTexto 5">
             <a:extLst>
               <a:ext uri="{FF2B5EF4-FFF2-40B4-BE49-F238E27FC236}">
-                <a16:creationId xmlns:a16="http://schemas.microsoft.com/office/drawing/2014/main" xmlns="" id="{7CF069DD-EDFC-CC3F-DD56-59C668E7E782}"/>
+                <a16:creationId xmlns:a16="http://schemas.microsoft.com/office/drawing/2014/main" id="{7CF069DD-EDFC-CC3F-DD56-59C668E7E782}"/>
               </a:ext>
             </a:extLst>
           </p:cNvPr>
@@ -13127,7 +13077,7 @@
           <p:cNvPr id="7" name="CaixaDeTexto 6">
             <a:extLst>
               <a:ext uri="{FF2B5EF4-FFF2-40B4-BE49-F238E27FC236}">
-                <a16:creationId xmlns:a16="http://schemas.microsoft.com/office/drawing/2014/main" xmlns="" id="{3160817B-5023-F2AE-B878-2F4AD2764249}"/>
+                <a16:creationId xmlns:a16="http://schemas.microsoft.com/office/drawing/2014/main" id="{3160817B-5023-F2AE-B878-2F4AD2764249}"/>
               </a:ext>
             </a:extLst>
           </p:cNvPr>
@@ -13167,7 +13117,7 @@
           <p:cNvPr id="9" name="Conector de Seta Reta 8">
             <a:extLst>
               <a:ext uri="{FF2B5EF4-FFF2-40B4-BE49-F238E27FC236}">
-                <a16:creationId xmlns:a16="http://schemas.microsoft.com/office/drawing/2014/main" xmlns="" id="{433D01AC-78E3-F26E-A91D-5BDB058412D4}"/>
+                <a16:creationId xmlns:a16="http://schemas.microsoft.com/office/drawing/2014/main" id="{433D01AC-78E3-F26E-A91D-5BDB058412D4}"/>
               </a:ext>
             </a:extLst>
           </p:cNvPr>
@@ -13241,7 +13191,7 @@
           <p:cNvPr id="2" name="Título 1">
             <a:extLst>
               <a:ext uri="{FF2B5EF4-FFF2-40B4-BE49-F238E27FC236}">
-                <a16:creationId xmlns:a16="http://schemas.microsoft.com/office/drawing/2014/main" xmlns="" id="{C81B1586-529A-A679-60A3-A0D83AC9CEB5}"/>
+                <a16:creationId xmlns:a16="http://schemas.microsoft.com/office/drawing/2014/main" id="{C81B1586-529A-A679-60A3-A0D83AC9CEB5}"/>
               </a:ext>
             </a:extLst>
           </p:cNvPr>
@@ -13274,7 +13224,7 @@
           <p:cNvPr id="3" name="Espaço Reservado para Conteúdo 2">
             <a:extLst>
               <a:ext uri="{FF2B5EF4-FFF2-40B4-BE49-F238E27FC236}">
-                <a16:creationId xmlns:a16="http://schemas.microsoft.com/office/drawing/2014/main" xmlns="" id="{39A11C6A-E0FA-69E8-0E7C-434857DB5D45}"/>
+                <a16:creationId xmlns:a16="http://schemas.microsoft.com/office/drawing/2014/main" id="{39A11C6A-E0FA-69E8-0E7C-434857DB5D45}"/>
               </a:ext>
             </a:extLst>
           </p:cNvPr>
@@ -13574,7 +13524,23 @@
                   <a:srgbClr val="00B050"/>
                 </a:solidFill>
               </a:rPr>
-              <a:t>Entrega: 28/11/2025 até às 23:59.</a:t>
+              <a:t>Entrega</a:t>
+            </a:r>
+            <a:r>
+              <a:rPr lang="pt-BR" b="1">
+                <a:solidFill>
+                  <a:srgbClr val="00B050"/>
+                </a:solidFill>
+              </a:rPr>
+              <a:t>: 27/06/2026 </a:t>
+            </a:r>
+            <a:r>
+              <a:rPr lang="pt-BR" b="1" dirty="0">
+                <a:solidFill>
+                  <a:srgbClr val="00B050"/>
+                </a:solidFill>
+              </a:rPr>
+              <a:t>até às 23:59.</a:t>
             </a:r>
           </a:p>
           <a:p>
@@ -13914,7 +13880,7 @@
           <p:cNvPr id="4" name="Título 1">
             <a:extLst>
               <a:ext uri="{FF2B5EF4-FFF2-40B4-BE49-F238E27FC236}">
-                <a16:creationId xmlns:a16="http://schemas.microsoft.com/office/drawing/2014/main" xmlns="" id="{32666AC8-2E17-4DB4-B0F5-60C640CCFD2E}"/>
+                <a16:creationId xmlns:a16="http://schemas.microsoft.com/office/drawing/2014/main" id="{32666AC8-2E17-4DB4-B0F5-60C640CCFD2E}"/>
               </a:ext>
             </a:extLst>
           </p:cNvPr>
@@ -16193,7 +16159,7 @@
           <p:cNvPr id="55" name="Agrupar 54">
             <a:extLst>
               <a:ext uri="{FF2B5EF4-FFF2-40B4-BE49-F238E27FC236}">
-                <a16:creationId xmlns:a16="http://schemas.microsoft.com/office/drawing/2014/main" xmlns="" id="{DA578016-49F4-7B5A-6434-137A7D90C33A}"/>
+                <a16:creationId xmlns:a16="http://schemas.microsoft.com/office/drawing/2014/main" id="{DA578016-49F4-7B5A-6434-137A7D90C33A}"/>
               </a:ext>
             </a:extLst>
           </p:cNvPr>
@@ -17915,7 +17881,7 @@
             <p:cNvPr id="3" name="TextBox 31">
               <a:extLst>
                 <a:ext uri="{FF2B5EF4-FFF2-40B4-BE49-F238E27FC236}">
-                  <a16:creationId xmlns:a16="http://schemas.microsoft.com/office/drawing/2014/main" xmlns="" id="{5B6C016C-C798-6D87-AC5D-9D3B3886D981}"/>
+                  <a16:creationId xmlns:a16="http://schemas.microsoft.com/office/drawing/2014/main" id="{5B6C016C-C798-6D87-AC5D-9D3B3886D981}"/>
                 </a:ext>
               </a:extLst>
             </p:cNvPr>
@@ -17951,7 +17917,7 @@
             <p:cNvPr id="41" name="TextBox 31">
               <a:extLst>
                 <a:ext uri="{FF2B5EF4-FFF2-40B4-BE49-F238E27FC236}">
-                  <a16:creationId xmlns:a16="http://schemas.microsoft.com/office/drawing/2014/main" xmlns="" id="{7D40CE25-BC43-5CA8-F6DE-581220ED26DE}"/>
+                  <a16:creationId xmlns:a16="http://schemas.microsoft.com/office/drawing/2014/main" id="{7D40CE25-BC43-5CA8-F6DE-581220ED26DE}"/>
                 </a:ext>
               </a:extLst>
             </p:cNvPr>
@@ -17987,7 +17953,7 @@
             <p:cNvPr id="42" name="TextBox 31">
               <a:extLst>
                 <a:ext uri="{FF2B5EF4-FFF2-40B4-BE49-F238E27FC236}">
-                  <a16:creationId xmlns:a16="http://schemas.microsoft.com/office/drawing/2014/main" xmlns="" id="{E3171720-F162-1786-39B6-1FA6EB97B9AD}"/>
+                  <a16:creationId xmlns:a16="http://schemas.microsoft.com/office/drawing/2014/main" id="{E3171720-F162-1786-39B6-1FA6EB97B9AD}"/>
                 </a:ext>
               </a:extLst>
             </p:cNvPr>
@@ -18023,7 +17989,7 @@
             <p:cNvPr id="43" name="TextBox 31">
               <a:extLst>
                 <a:ext uri="{FF2B5EF4-FFF2-40B4-BE49-F238E27FC236}">
-                  <a16:creationId xmlns:a16="http://schemas.microsoft.com/office/drawing/2014/main" xmlns="" id="{37B3F8CE-B6B5-EA4F-A7AB-6605DF581A28}"/>
+                  <a16:creationId xmlns:a16="http://schemas.microsoft.com/office/drawing/2014/main" id="{37B3F8CE-B6B5-EA4F-A7AB-6605DF581A28}"/>
                 </a:ext>
               </a:extLst>
             </p:cNvPr>
@@ -18059,7 +18025,7 @@
             <p:cNvPr id="44" name="TextBox 31">
               <a:extLst>
                 <a:ext uri="{FF2B5EF4-FFF2-40B4-BE49-F238E27FC236}">
-                  <a16:creationId xmlns:a16="http://schemas.microsoft.com/office/drawing/2014/main" xmlns="" id="{C723F0F7-5049-3645-E693-B0AE7BE2A592}"/>
+                  <a16:creationId xmlns:a16="http://schemas.microsoft.com/office/drawing/2014/main" id="{C723F0F7-5049-3645-E693-B0AE7BE2A592}"/>
                 </a:ext>
               </a:extLst>
             </p:cNvPr>
@@ -18095,7 +18061,7 @@
             <p:cNvPr id="46" name="Conector de Seta Reta 45">
               <a:extLst>
                 <a:ext uri="{FF2B5EF4-FFF2-40B4-BE49-F238E27FC236}">
-                  <a16:creationId xmlns:a16="http://schemas.microsoft.com/office/drawing/2014/main" xmlns="" id="{EA7EB0A1-839F-04EC-9BFD-B346635B7B47}"/>
+                  <a16:creationId xmlns:a16="http://schemas.microsoft.com/office/drawing/2014/main" id="{EA7EB0A1-839F-04EC-9BFD-B346635B7B47}"/>
                 </a:ext>
               </a:extLst>
             </p:cNvPr>
@@ -18139,7 +18105,7 @@
             <p:cNvPr id="48" name="Conector de Seta Reta 47">
               <a:extLst>
                 <a:ext uri="{FF2B5EF4-FFF2-40B4-BE49-F238E27FC236}">
-                  <a16:creationId xmlns:a16="http://schemas.microsoft.com/office/drawing/2014/main" xmlns="" id="{6B741BC6-2721-A5FE-9482-6E8D1E5CEE59}"/>
+                  <a16:creationId xmlns:a16="http://schemas.microsoft.com/office/drawing/2014/main" id="{6B741BC6-2721-A5FE-9482-6E8D1E5CEE59}"/>
                 </a:ext>
               </a:extLst>
             </p:cNvPr>
@@ -18183,7 +18149,7 @@
             <p:cNvPr id="49" name="Conector de Seta Reta 48">
               <a:extLst>
                 <a:ext uri="{FF2B5EF4-FFF2-40B4-BE49-F238E27FC236}">
-                  <a16:creationId xmlns:a16="http://schemas.microsoft.com/office/drawing/2014/main" xmlns="" id="{D06DAFBD-5149-EBB5-EF50-D447B6907E67}"/>
+                  <a16:creationId xmlns:a16="http://schemas.microsoft.com/office/drawing/2014/main" id="{D06DAFBD-5149-EBB5-EF50-D447B6907E67}"/>
                 </a:ext>
               </a:extLst>
             </p:cNvPr>
@@ -18227,7 +18193,7 @@
             <p:cNvPr id="50" name="Conector de Seta Reta 49">
               <a:extLst>
                 <a:ext uri="{FF2B5EF4-FFF2-40B4-BE49-F238E27FC236}">
-                  <a16:creationId xmlns:a16="http://schemas.microsoft.com/office/drawing/2014/main" xmlns="" id="{6A0920E9-176A-C6E9-AD59-ED153B3468A2}"/>
+                  <a16:creationId xmlns:a16="http://schemas.microsoft.com/office/drawing/2014/main" id="{6A0920E9-176A-C6E9-AD59-ED153B3468A2}"/>
                 </a:ext>
               </a:extLst>
             </p:cNvPr>
@@ -18271,7 +18237,7 @@
             <p:cNvPr id="51" name="Conector de Seta Reta 50">
               <a:extLst>
                 <a:ext uri="{FF2B5EF4-FFF2-40B4-BE49-F238E27FC236}">
-                  <a16:creationId xmlns:a16="http://schemas.microsoft.com/office/drawing/2014/main" xmlns="" id="{3CADDC92-40BF-7BD1-731D-177383B48F71}"/>
+                  <a16:creationId xmlns:a16="http://schemas.microsoft.com/office/drawing/2014/main" id="{3CADDC92-40BF-7BD1-731D-177383B48F71}"/>
                 </a:ext>
               </a:extLst>
             </p:cNvPr>
@@ -18315,7 +18281,7 @@
             <p:cNvPr id="52" name="Chave Direita 51">
               <a:extLst>
                 <a:ext uri="{FF2B5EF4-FFF2-40B4-BE49-F238E27FC236}">
-                  <a16:creationId xmlns:a16="http://schemas.microsoft.com/office/drawing/2014/main" xmlns="" id="{C04B98C8-50FC-33B3-81AF-705DDBDD9C1A}"/>
+                  <a16:creationId xmlns:a16="http://schemas.microsoft.com/office/drawing/2014/main" id="{C04B98C8-50FC-33B3-81AF-705DDBDD9C1A}"/>
                 </a:ext>
               </a:extLst>
             </p:cNvPr>
@@ -18366,7 +18332,7 @@
                 <p:cNvPr id="53" name="CaixaDeTexto 52">
                   <a:extLst>
                     <a:ext uri="{FF2B5EF4-FFF2-40B4-BE49-F238E27FC236}">
-                      <a16:creationId xmlns:a16="http://schemas.microsoft.com/office/drawing/2014/main" xmlns="" id="{BB930755-BFBC-9044-A7B4-99BDA581FF72}"/>
+                      <a16:creationId xmlns:a16="http://schemas.microsoft.com/office/drawing/2014/main" id="{BB930755-BFBC-9044-A7B4-99BDA581FF72}"/>
                     </a:ext>
                   </a:extLst>
                 </p:cNvPr>
@@ -18597,7 +18563,7 @@
           <p:cNvPr id="171" name="Agrupar 170">
             <a:extLst>
               <a:ext uri="{FF2B5EF4-FFF2-40B4-BE49-F238E27FC236}">
-                <a16:creationId xmlns:a16="http://schemas.microsoft.com/office/drawing/2014/main" xmlns="" id="{FB2690F4-D40A-BD60-BD86-E3AF65A6DE84}"/>
+                <a16:creationId xmlns:a16="http://schemas.microsoft.com/office/drawing/2014/main" id="{FB2690F4-D40A-BD60-BD86-E3AF65A6DE84}"/>
               </a:ext>
             </a:extLst>
           </p:cNvPr>
@@ -19255,7 +19221,7 @@
             <p:cNvPr id="2" name="Rectangle 4">
               <a:extLst>
                 <a:ext uri="{FF2B5EF4-FFF2-40B4-BE49-F238E27FC236}">
-                  <a16:creationId xmlns:a16="http://schemas.microsoft.com/office/drawing/2014/main" xmlns="" id="{3E0C8815-87A1-97C0-4BD9-7808E5FC2E5E}"/>
+                  <a16:creationId xmlns:a16="http://schemas.microsoft.com/office/drawing/2014/main" id="{3E0C8815-87A1-97C0-4BD9-7808E5FC2E5E}"/>
                 </a:ext>
               </a:extLst>
             </p:cNvPr>
@@ -19314,7 +19280,7 @@
             <p:cNvPr id="4" name="Rectangle 5">
               <a:extLst>
                 <a:ext uri="{FF2B5EF4-FFF2-40B4-BE49-F238E27FC236}">
-                  <a16:creationId xmlns:a16="http://schemas.microsoft.com/office/drawing/2014/main" xmlns="" id="{07B7A964-8E17-B906-DE14-C8AD2035950B}"/>
+                  <a16:creationId xmlns:a16="http://schemas.microsoft.com/office/drawing/2014/main" id="{07B7A964-8E17-B906-DE14-C8AD2035950B}"/>
                 </a:ext>
               </a:extLst>
             </p:cNvPr>
@@ -19373,7 +19339,7 @@
             <p:cNvPr id="45" name="Rectangle 8">
               <a:extLst>
                 <a:ext uri="{FF2B5EF4-FFF2-40B4-BE49-F238E27FC236}">
-                  <a16:creationId xmlns:a16="http://schemas.microsoft.com/office/drawing/2014/main" xmlns="" id="{70038EE2-687E-6AAD-D0A0-70D414463074}"/>
+                  <a16:creationId xmlns:a16="http://schemas.microsoft.com/office/drawing/2014/main" id="{70038EE2-687E-6AAD-D0A0-70D414463074}"/>
                 </a:ext>
               </a:extLst>
             </p:cNvPr>
@@ -19432,7 +19398,7 @@
             <p:cNvPr id="47" name="Rectangle 9">
               <a:extLst>
                 <a:ext uri="{FF2B5EF4-FFF2-40B4-BE49-F238E27FC236}">
-                  <a16:creationId xmlns:a16="http://schemas.microsoft.com/office/drawing/2014/main" xmlns="" id="{FCE54C16-1489-F0D8-5BA0-FC50E977B4DF}"/>
+                  <a16:creationId xmlns:a16="http://schemas.microsoft.com/office/drawing/2014/main" id="{FCE54C16-1489-F0D8-5BA0-FC50E977B4DF}"/>
                 </a:ext>
               </a:extLst>
             </p:cNvPr>
@@ -19491,7 +19457,7 @@
             <p:cNvPr id="54" name="Rectangle 10">
               <a:extLst>
                 <a:ext uri="{FF2B5EF4-FFF2-40B4-BE49-F238E27FC236}">
-                  <a16:creationId xmlns:a16="http://schemas.microsoft.com/office/drawing/2014/main" xmlns="" id="{4F422D72-8F54-0137-1BE9-4091B85E94AD}"/>
+                  <a16:creationId xmlns:a16="http://schemas.microsoft.com/office/drawing/2014/main" id="{4F422D72-8F54-0137-1BE9-4091B85E94AD}"/>
                 </a:ext>
               </a:extLst>
             </p:cNvPr>
@@ -19550,7 +19516,7 @@
             <p:cNvPr id="76" name="Rectangle 4">
               <a:extLst>
                 <a:ext uri="{FF2B5EF4-FFF2-40B4-BE49-F238E27FC236}">
-                  <a16:creationId xmlns:a16="http://schemas.microsoft.com/office/drawing/2014/main" xmlns="" id="{2283FE89-7433-51C6-5735-084A0DF0D4DB}"/>
+                  <a16:creationId xmlns:a16="http://schemas.microsoft.com/office/drawing/2014/main" id="{2283FE89-7433-51C6-5735-084A0DF0D4DB}"/>
                 </a:ext>
               </a:extLst>
             </p:cNvPr>
@@ -19609,7 +19575,7 @@
             <p:cNvPr id="77" name="Rectangle 5">
               <a:extLst>
                 <a:ext uri="{FF2B5EF4-FFF2-40B4-BE49-F238E27FC236}">
-                  <a16:creationId xmlns:a16="http://schemas.microsoft.com/office/drawing/2014/main" xmlns="" id="{051DBCF5-B432-C13E-A11C-540FE1CE7858}"/>
+                  <a16:creationId xmlns:a16="http://schemas.microsoft.com/office/drawing/2014/main" id="{051DBCF5-B432-C13E-A11C-540FE1CE7858}"/>
                 </a:ext>
               </a:extLst>
             </p:cNvPr>
@@ -19668,7 +19634,7 @@
             <p:cNvPr id="78" name="Rectangle 8">
               <a:extLst>
                 <a:ext uri="{FF2B5EF4-FFF2-40B4-BE49-F238E27FC236}">
-                  <a16:creationId xmlns:a16="http://schemas.microsoft.com/office/drawing/2014/main" xmlns="" id="{761054CF-8645-8575-0494-73C7EB91FEFA}"/>
+                  <a16:creationId xmlns:a16="http://schemas.microsoft.com/office/drawing/2014/main" id="{761054CF-8645-8575-0494-73C7EB91FEFA}"/>
                 </a:ext>
               </a:extLst>
             </p:cNvPr>
@@ -19727,7 +19693,7 @@
             <p:cNvPr id="79" name="Rectangle 9">
               <a:extLst>
                 <a:ext uri="{FF2B5EF4-FFF2-40B4-BE49-F238E27FC236}">
-                  <a16:creationId xmlns:a16="http://schemas.microsoft.com/office/drawing/2014/main" xmlns="" id="{6039AFAE-6C30-8DBA-B654-E8199E13783F}"/>
+                  <a16:creationId xmlns:a16="http://schemas.microsoft.com/office/drawing/2014/main" id="{6039AFAE-6C30-8DBA-B654-E8199E13783F}"/>
                 </a:ext>
               </a:extLst>
             </p:cNvPr>
@@ -19786,7 +19752,7 @@
             <p:cNvPr id="80" name="Rectangle 10">
               <a:extLst>
                 <a:ext uri="{FF2B5EF4-FFF2-40B4-BE49-F238E27FC236}">
-                  <a16:creationId xmlns:a16="http://schemas.microsoft.com/office/drawing/2014/main" xmlns="" id="{788BCF8B-6879-C98E-522D-E046966AD0B9}"/>
+                  <a16:creationId xmlns:a16="http://schemas.microsoft.com/office/drawing/2014/main" id="{788BCF8B-6879-C98E-522D-E046966AD0B9}"/>
                 </a:ext>
               </a:extLst>
             </p:cNvPr>
@@ -19845,7 +19811,7 @@
             <p:cNvPr id="81" name="Rectangle 4">
               <a:extLst>
                 <a:ext uri="{FF2B5EF4-FFF2-40B4-BE49-F238E27FC236}">
-                  <a16:creationId xmlns:a16="http://schemas.microsoft.com/office/drawing/2014/main" xmlns="" id="{C07613FC-1BCE-1C31-7521-C4AD16E89534}"/>
+                  <a16:creationId xmlns:a16="http://schemas.microsoft.com/office/drawing/2014/main" id="{C07613FC-1BCE-1C31-7521-C4AD16E89534}"/>
                 </a:ext>
               </a:extLst>
             </p:cNvPr>
@@ -19904,7 +19870,7 @@
             <p:cNvPr id="82" name="Rectangle 5">
               <a:extLst>
                 <a:ext uri="{FF2B5EF4-FFF2-40B4-BE49-F238E27FC236}">
-                  <a16:creationId xmlns:a16="http://schemas.microsoft.com/office/drawing/2014/main" xmlns="" id="{3FA9A90C-A974-75EC-C0FB-4582FD57F573}"/>
+                  <a16:creationId xmlns:a16="http://schemas.microsoft.com/office/drawing/2014/main" id="{3FA9A90C-A974-75EC-C0FB-4582FD57F573}"/>
                 </a:ext>
               </a:extLst>
             </p:cNvPr>
@@ -19963,7 +19929,7 @@
             <p:cNvPr id="83" name="Rectangle 8">
               <a:extLst>
                 <a:ext uri="{FF2B5EF4-FFF2-40B4-BE49-F238E27FC236}">
-                  <a16:creationId xmlns:a16="http://schemas.microsoft.com/office/drawing/2014/main" xmlns="" id="{8B939714-6F90-C043-90A8-4114E676CE91}"/>
+                  <a16:creationId xmlns:a16="http://schemas.microsoft.com/office/drawing/2014/main" id="{8B939714-6F90-C043-90A8-4114E676CE91}"/>
                 </a:ext>
               </a:extLst>
             </p:cNvPr>
@@ -20022,7 +19988,7 @@
             <p:cNvPr id="84" name="Rectangle 9">
               <a:extLst>
                 <a:ext uri="{FF2B5EF4-FFF2-40B4-BE49-F238E27FC236}">
-                  <a16:creationId xmlns:a16="http://schemas.microsoft.com/office/drawing/2014/main" xmlns="" id="{00C4E9F4-C083-FC2A-2572-06612126790E}"/>
+                  <a16:creationId xmlns:a16="http://schemas.microsoft.com/office/drawing/2014/main" id="{00C4E9F4-C083-FC2A-2572-06612126790E}"/>
                 </a:ext>
               </a:extLst>
             </p:cNvPr>
@@ -20081,7 +20047,7 @@
             <p:cNvPr id="85" name="Rectangle 10">
               <a:extLst>
                 <a:ext uri="{FF2B5EF4-FFF2-40B4-BE49-F238E27FC236}">
-                  <a16:creationId xmlns:a16="http://schemas.microsoft.com/office/drawing/2014/main" xmlns="" id="{2F5C2137-ACC7-E80B-27F3-22F179A293F1}"/>
+                  <a16:creationId xmlns:a16="http://schemas.microsoft.com/office/drawing/2014/main" id="{2F5C2137-ACC7-E80B-27F3-22F179A293F1}"/>
                 </a:ext>
               </a:extLst>
             </p:cNvPr>
@@ -20140,7 +20106,7 @@
             <p:cNvPr id="86" name="Rectangle 4">
               <a:extLst>
                 <a:ext uri="{FF2B5EF4-FFF2-40B4-BE49-F238E27FC236}">
-                  <a16:creationId xmlns:a16="http://schemas.microsoft.com/office/drawing/2014/main" xmlns="" id="{B48457E1-AC7F-C61B-5AA6-8BF3B60689C9}"/>
+                  <a16:creationId xmlns:a16="http://schemas.microsoft.com/office/drawing/2014/main" id="{B48457E1-AC7F-C61B-5AA6-8BF3B60689C9}"/>
                 </a:ext>
               </a:extLst>
             </p:cNvPr>
@@ -20199,7 +20165,7 @@
             <p:cNvPr id="87" name="Rectangle 5">
               <a:extLst>
                 <a:ext uri="{FF2B5EF4-FFF2-40B4-BE49-F238E27FC236}">
-                  <a16:creationId xmlns:a16="http://schemas.microsoft.com/office/drawing/2014/main" xmlns="" id="{5DDAA7AC-D2B5-1BE8-0A74-A50004F601A1}"/>
+                  <a16:creationId xmlns:a16="http://schemas.microsoft.com/office/drawing/2014/main" id="{5DDAA7AC-D2B5-1BE8-0A74-A50004F601A1}"/>
                 </a:ext>
               </a:extLst>
             </p:cNvPr>
@@ -20258,7 +20224,7 @@
             <p:cNvPr id="88" name="Rectangle 8">
               <a:extLst>
                 <a:ext uri="{FF2B5EF4-FFF2-40B4-BE49-F238E27FC236}">
-                  <a16:creationId xmlns:a16="http://schemas.microsoft.com/office/drawing/2014/main" xmlns="" id="{272CD568-3FFE-1F7A-7481-8A64DDD94835}"/>
+                  <a16:creationId xmlns:a16="http://schemas.microsoft.com/office/drawing/2014/main" id="{272CD568-3FFE-1F7A-7481-8A64DDD94835}"/>
                 </a:ext>
               </a:extLst>
             </p:cNvPr>
@@ -20317,7 +20283,7 @@
             <p:cNvPr id="89" name="Rectangle 9">
               <a:extLst>
                 <a:ext uri="{FF2B5EF4-FFF2-40B4-BE49-F238E27FC236}">
-                  <a16:creationId xmlns:a16="http://schemas.microsoft.com/office/drawing/2014/main" xmlns="" id="{3CA9A11F-DEA5-87B4-3B32-F0A2D358B916}"/>
+                  <a16:creationId xmlns:a16="http://schemas.microsoft.com/office/drawing/2014/main" id="{3CA9A11F-DEA5-87B4-3B32-F0A2D358B916}"/>
                 </a:ext>
               </a:extLst>
             </p:cNvPr>
@@ -20376,7 +20342,7 @@
             <p:cNvPr id="90" name="Rectangle 10">
               <a:extLst>
                 <a:ext uri="{FF2B5EF4-FFF2-40B4-BE49-F238E27FC236}">
-                  <a16:creationId xmlns:a16="http://schemas.microsoft.com/office/drawing/2014/main" xmlns="" id="{D6DE5989-DA87-9CAE-6175-4E16FE0A7129}"/>
+                  <a16:creationId xmlns:a16="http://schemas.microsoft.com/office/drawing/2014/main" id="{D6DE5989-DA87-9CAE-6175-4E16FE0A7129}"/>
                 </a:ext>
               </a:extLst>
             </p:cNvPr>
@@ -20435,7 +20401,7 @@
             <p:cNvPr id="91" name="Rectangle 4">
               <a:extLst>
                 <a:ext uri="{FF2B5EF4-FFF2-40B4-BE49-F238E27FC236}">
-                  <a16:creationId xmlns:a16="http://schemas.microsoft.com/office/drawing/2014/main" xmlns="" id="{409D1E0D-2047-3C23-DFB8-69936F43195E}"/>
+                  <a16:creationId xmlns:a16="http://schemas.microsoft.com/office/drawing/2014/main" id="{409D1E0D-2047-3C23-DFB8-69936F43195E}"/>
                 </a:ext>
               </a:extLst>
             </p:cNvPr>
@@ -20494,7 +20460,7 @@
             <p:cNvPr id="92" name="Rectangle 5">
               <a:extLst>
                 <a:ext uri="{FF2B5EF4-FFF2-40B4-BE49-F238E27FC236}">
-                  <a16:creationId xmlns:a16="http://schemas.microsoft.com/office/drawing/2014/main" xmlns="" id="{0B727EDB-49E8-FBE2-9107-8DA684CFFA0A}"/>
+                  <a16:creationId xmlns:a16="http://schemas.microsoft.com/office/drawing/2014/main" id="{0B727EDB-49E8-FBE2-9107-8DA684CFFA0A}"/>
                 </a:ext>
               </a:extLst>
             </p:cNvPr>
@@ -20553,7 +20519,7 @@
             <p:cNvPr id="93" name="Rectangle 8">
               <a:extLst>
                 <a:ext uri="{FF2B5EF4-FFF2-40B4-BE49-F238E27FC236}">
-                  <a16:creationId xmlns:a16="http://schemas.microsoft.com/office/drawing/2014/main" xmlns="" id="{4203E2E6-38D9-A443-6D30-807E3ACB401F}"/>
+                  <a16:creationId xmlns:a16="http://schemas.microsoft.com/office/drawing/2014/main" id="{4203E2E6-38D9-A443-6D30-807E3ACB401F}"/>
                 </a:ext>
               </a:extLst>
             </p:cNvPr>
@@ -20612,7 +20578,7 @@
             <p:cNvPr id="94" name="Rectangle 9">
               <a:extLst>
                 <a:ext uri="{FF2B5EF4-FFF2-40B4-BE49-F238E27FC236}">
-                  <a16:creationId xmlns:a16="http://schemas.microsoft.com/office/drawing/2014/main" xmlns="" id="{863B09E3-9846-5790-F0D4-312F01A9EE1C}"/>
+                  <a16:creationId xmlns:a16="http://schemas.microsoft.com/office/drawing/2014/main" id="{863B09E3-9846-5790-F0D4-312F01A9EE1C}"/>
                 </a:ext>
               </a:extLst>
             </p:cNvPr>
@@ -20671,7 +20637,7 @@
             <p:cNvPr id="95" name="Rectangle 10">
               <a:extLst>
                 <a:ext uri="{FF2B5EF4-FFF2-40B4-BE49-F238E27FC236}">
-                  <a16:creationId xmlns:a16="http://schemas.microsoft.com/office/drawing/2014/main" xmlns="" id="{05B3F3F5-B285-ADD0-5CD4-BC3FE7AB2BCF}"/>
+                  <a16:creationId xmlns:a16="http://schemas.microsoft.com/office/drawing/2014/main" id="{05B3F3F5-B285-ADD0-5CD4-BC3FE7AB2BCF}"/>
                 </a:ext>
               </a:extLst>
             </p:cNvPr>
@@ -20730,7 +20696,7 @@
             <p:cNvPr id="96" name="Rectangle 4">
               <a:extLst>
                 <a:ext uri="{FF2B5EF4-FFF2-40B4-BE49-F238E27FC236}">
-                  <a16:creationId xmlns:a16="http://schemas.microsoft.com/office/drawing/2014/main" xmlns="" id="{9849878E-0A96-AE96-89F7-E05D48549983}"/>
+                  <a16:creationId xmlns:a16="http://schemas.microsoft.com/office/drawing/2014/main" id="{9849878E-0A96-AE96-89F7-E05D48549983}"/>
                 </a:ext>
               </a:extLst>
             </p:cNvPr>
@@ -20789,7 +20755,7 @@
             <p:cNvPr id="97" name="Rectangle 5">
               <a:extLst>
                 <a:ext uri="{FF2B5EF4-FFF2-40B4-BE49-F238E27FC236}">
-                  <a16:creationId xmlns:a16="http://schemas.microsoft.com/office/drawing/2014/main" xmlns="" id="{398E24AA-E1A6-E633-0E9F-C9E541DF5DF6}"/>
+                  <a16:creationId xmlns:a16="http://schemas.microsoft.com/office/drawing/2014/main" id="{398E24AA-E1A6-E633-0E9F-C9E541DF5DF6}"/>
                 </a:ext>
               </a:extLst>
             </p:cNvPr>
@@ -20848,7 +20814,7 @@
             <p:cNvPr id="98" name="Rectangle 8">
               <a:extLst>
                 <a:ext uri="{FF2B5EF4-FFF2-40B4-BE49-F238E27FC236}">
-                  <a16:creationId xmlns:a16="http://schemas.microsoft.com/office/drawing/2014/main" xmlns="" id="{0232F202-6AA5-8E3E-7B05-4D8C7193B239}"/>
+                  <a16:creationId xmlns:a16="http://schemas.microsoft.com/office/drawing/2014/main" id="{0232F202-6AA5-8E3E-7B05-4D8C7193B239}"/>
                 </a:ext>
               </a:extLst>
             </p:cNvPr>
@@ -20907,7 +20873,7 @@
             <p:cNvPr id="99" name="Rectangle 9">
               <a:extLst>
                 <a:ext uri="{FF2B5EF4-FFF2-40B4-BE49-F238E27FC236}">
-                  <a16:creationId xmlns:a16="http://schemas.microsoft.com/office/drawing/2014/main" xmlns="" id="{A8F3C8CB-EC4A-7B9B-2B89-54C3B5E11948}"/>
+                  <a16:creationId xmlns:a16="http://schemas.microsoft.com/office/drawing/2014/main" id="{A8F3C8CB-EC4A-7B9B-2B89-54C3B5E11948}"/>
                 </a:ext>
               </a:extLst>
             </p:cNvPr>
@@ -20966,7 +20932,7 @@
             <p:cNvPr id="100" name="Rectangle 10">
               <a:extLst>
                 <a:ext uri="{FF2B5EF4-FFF2-40B4-BE49-F238E27FC236}">
-                  <a16:creationId xmlns:a16="http://schemas.microsoft.com/office/drawing/2014/main" xmlns="" id="{2696F711-8260-2112-90D0-26DD4112C8F9}"/>
+                  <a16:creationId xmlns:a16="http://schemas.microsoft.com/office/drawing/2014/main" id="{2696F711-8260-2112-90D0-26DD4112C8F9}"/>
                 </a:ext>
               </a:extLst>
             </p:cNvPr>
@@ -21025,7 +20991,7 @@
             <p:cNvPr id="101" name="Rectangle 4">
               <a:extLst>
                 <a:ext uri="{FF2B5EF4-FFF2-40B4-BE49-F238E27FC236}">
-                  <a16:creationId xmlns:a16="http://schemas.microsoft.com/office/drawing/2014/main" xmlns="" id="{F3838DC9-5128-18D0-5929-399D637340F9}"/>
+                  <a16:creationId xmlns:a16="http://schemas.microsoft.com/office/drawing/2014/main" id="{F3838DC9-5128-18D0-5929-399D637340F9}"/>
                 </a:ext>
               </a:extLst>
             </p:cNvPr>
@@ -21084,7 +21050,7 @@
             <p:cNvPr id="102" name="Rectangle 5">
               <a:extLst>
                 <a:ext uri="{FF2B5EF4-FFF2-40B4-BE49-F238E27FC236}">
-                  <a16:creationId xmlns:a16="http://schemas.microsoft.com/office/drawing/2014/main" xmlns="" id="{5691A143-E500-6CD8-CD0A-C75B807D6155}"/>
+                  <a16:creationId xmlns:a16="http://schemas.microsoft.com/office/drawing/2014/main" id="{5691A143-E500-6CD8-CD0A-C75B807D6155}"/>
                 </a:ext>
               </a:extLst>
             </p:cNvPr>
@@ -21143,7 +21109,7 @@
             <p:cNvPr id="103" name="Rectangle 8">
               <a:extLst>
                 <a:ext uri="{FF2B5EF4-FFF2-40B4-BE49-F238E27FC236}">
-                  <a16:creationId xmlns:a16="http://schemas.microsoft.com/office/drawing/2014/main" xmlns="" id="{0510AE94-694E-2D36-6F1C-C5FD66AA6DE5}"/>
+                  <a16:creationId xmlns:a16="http://schemas.microsoft.com/office/drawing/2014/main" id="{0510AE94-694E-2D36-6F1C-C5FD66AA6DE5}"/>
                 </a:ext>
               </a:extLst>
             </p:cNvPr>
@@ -21202,7 +21168,7 @@
             <p:cNvPr id="104" name="Rectangle 9">
               <a:extLst>
                 <a:ext uri="{FF2B5EF4-FFF2-40B4-BE49-F238E27FC236}">
-                  <a16:creationId xmlns:a16="http://schemas.microsoft.com/office/drawing/2014/main" xmlns="" id="{08CF86E4-4BCC-852B-9D55-0A26F146D48C}"/>
+                  <a16:creationId xmlns:a16="http://schemas.microsoft.com/office/drawing/2014/main" id="{08CF86E4-4BCC-852B-9D55-0A26F146D48C}"/>
                 </a:ext>
               </a:extLst>
             </p:cNvPr>
@@ -21261,7 +21227,7 @@
             <p:cNvPr id="105" name="Rectangle 10">
               <a:extLst>
                 <a:ext uri="{FF2B5EF4-FFF2-40B4-BE49-F238E27FC236}">
-                  <a16:creationId xmlns:a16="http://schemas.microsoft.com/office/drawing/2014/main" xmlns="" id="{A3304B0F-DEB9-C387-769D-6C1D21F54C57}"/>
+                  <a16:creationId xmlns:a16="http://schemas.microsoft.com/office/drawing/2014/main" id="{A3304B0F-DEB9-C387-769D-6C1D21F54C57}"/>
                 </a:ext>
               </a:extLst>
             </p:cNvPr>
@@ -21320,7 +21286,7 @@
             <p:cNvPr id="106" name="Rectangle 4">
               <a:extLst>
                 <a:ext uri="{FF2B5EF4-FFF2-40B4-BE49-F238E27FC236}">
-                  <a16:creationId xmlns:a16="http://schemas.microsoft.com/office/drawing/2014/main" xmlns="" id="{F7F2BA7F-4B49-EF50-1DFF-102BBE388693}"/>
+                  <a16:creationId xmlns:a16="http://schemas.microsoft.com/office/drawing/2014/main" id="{F7F2BA7F-4B49-EF50-1DFF-102BBE388693}"/>
                 </a:ext>
               </a:extLst>
             </p:cNvPr>
@@ -21379,7 +21345,7 @@
             <p:cNvPr id="107" name="Rectangle 5">
               <a:extLst>
                 <a:ext uri="{FF2B5EF4-FFF2-40B4-BE49-F238E27FC236}">
-                  <a16:creationId xmlns:a16="http://schemas.microsoft.com/office/drawing/2014/main" xmlns="" id="{8590B6BB-EF8A-DA7F-2F0E-C0CFB6C81261}"/>
+                  <a16:creationId xmlns:a16="http://schemas.microsoft.com/office/drawing/2014/main" id="{8590B6BB-EF8A-DA7F-2F0E-C0CFB6C81261}"/>
                 </a:ext>
               </a:extLst>
             </p:cNvPr>
@@ -21438,7 +21404,7 @@
             <p:cNvPr id="108" name="Rectangle 8">
               <a:extLst>
                 <a:ext uri="{FF2B5EF4-FFF2-40B4-BE49-F238E27FC236}">
-                  <a16:creationId xmlns:a16="http://schemas.microsoft.com/office/drawing/2014/main" xmlns="" id="{DCF659FD-5AB1-9ADF-EBDE-8CA98D3EF290}"/>
+                  <a16:creationId xmlns:a16="http://schemas.microsoft.com/office/drawing/2014/main" id="{DCF659FD-5AB1-9ADF-EBDE-8CA98D3EF290}"/>
                 </a:ext>
               </a:extLst>
             </p:cNvPr>
@@ -21497,7 +21463,7 @@
             <p:cNvPr id="109" name="Rectangle 9">
               <a:extLst>
                 <a:ext uri="{FF2B5EF4-FFF2-40B4-BE49-F238E27FC236}">
-                  <a16:creationId xmlns:a16="http://schemas.microsoft.com/office/drawing/2014/main" xmlns="" id="{3CF016BC-FBFC-9F10-79C7-329D906A55D3}"/>
+                  <a16:creationId xmlns:a16="http://schemas.microsoft.com/office/drawing/2014/main" id="{3CF016BC-FBFC-9F10-79C7-329D906A55D3}"/>
                 </a:ext>
               </a:extLst>
             </p:cNvPr>
@@ -21556,7 +21522,7 @@
             <p:cNvPr id="110" name="Rectangle 10">
               <a:extLst>
                 <a:ext uri="{FF2B5EF4-FFF2-40B4-BE49-F238E27FC236}">
-                  <a16:creationId xmlns:a16="http://schemas.microsoft.com/office/drawing/2014/main" xmlns="" id="{A31B46DD-8A6C-9A15-807B-82773BC08873}"/>
+                  <a16:creationId xmlns:a16="http://schemas.microsoft.com/office/drawing/2014/main" id="{A31B46DD-8A6C-9A15-807B-82773BC08873}"/>
                 </a:ext>
               </a:extLst>
             </p:cNvPr>
@@ -21615,7 +21581,7 @@
             <p:cNvPr id="111" name="Rectangle 4">
               <a:extLst>
                 <a:ext uri="{FF2B5EF4-FFF2-40B4-BE49-F238E27FC236}">
-                  <a16:creationId xmlns:a16="http://schemas.microsoft.com/office/drawing/2014/main" xmlns="" id="{6CB8A52D-6368-ADA6-8753-B29B7D0771E8}"/>
+                  <a16:creationId xmlns:a16="http://schemas.microsoft.com/office/drawing/2014/main" id="{6CB8A52D-6368-ADA6-8753-B29B7D0771E8}"/>
                 </a:ext>
               </a:extLst>
             </p:cNvPr>
@@ -21674,7 +21640,7 @@
             <p:cNvPr id="112" name="Rectangle 5">
               <a:extLst>
                 <a:ext uri="{FF2B5EF4-FFF2-40B4-BE49-F238E27FC236}">
-                  <a16:creationId xmlns:a16="http://schemas.microsoft.com/office/drawing/2014/main" xmlns="" id="{CB8230C6-EA19-FE01-FD55-257850CF60AC}"/>
+                  <a16:creationId xmlns:a16="http://schemas.microsoft.com/office/drawing/2014/main" id="{CB8230C6-EA19-FE01-FD55-257850CF60AC}"/>
                 </a:ext>
               </a:extLst>
             </p:cNvPr>
@@ -21733,7 +21699,7 @@
             <p:cNvPr id="113" name="Rectangle 8">
               <a:extLst>
                 <a:ext uri="{FF2B5EF4-FFF2-40B4-BE49-F238E27FC236}">
-                  <a16:creationId xmlns:a16="http://schemas.microsoft.com/office/drawing/2014/main" xmlns="" id="{848AC2C9-074E-0153-F820-541D44FDAD67}"/>
+                  <a16:creationId xmlns:a16="http://schemas.microsoft.com/office/drawing/2014/main" id="{848AC2C9-074E-0153-F820-541D44FDAD67}"/>
                 </a:ext>
               </a:extLst>
             </p:cNvPr>
@@ -21792,7 +21758,7 @@
             <p:cNvPr id="114" name="Rectangle 9">
               <a:extLst>
                 <a:ext uri="{FF2B5EF4-FFF2-40B4-BE49-F238E27FC236}">
-                  <a16:creationId xmlns:a16="http://schemas.microsoft.com/office/drawing/2014/main" xmlns="" id="{09E406FC-BF6E-233D-D75A-2A75428EA9C5}"/>
+                  <a16:creationId xmlns:a16="http://schemas.microsoft.com/office/drawing/2014/main" id="{09E406FC-BF6E-233D-D75A-2A75428EA9C5}"/>
                 </a:ext>
               </a:extLst>
             </p:cNvPr>
@@ -21851,7 +21817,7 @@
             <p:cNvPr id="115" name="Rectangle 10">
               <a:extLst>
                 <a:ext uri="{FF2B5EF4-FFF2-40B4-BE49-F238E27FC236}">
-                  <a16:creationId xmlns:a16="http://schemas.microsoft.com/office/drawing/2014/main" xmlns="" id="{C0382306-AFD8-C1AA-0B19-537FEBF9426C}"/>
+                  <a16:creationId xmlns:a16="http://schemas.microsoft.com/office/drawing/2014/main" id="{C0382306-AFD8-C1AA-0B19-537FEBF9426C}"/>
                 </a:ext>
               </a:extLst>
             </p:cNvPr>
@@ -21910,7 +21876,7 @@
             <p:cNvPr id="116" name="Rectangle 4">
               <a:extLst>
                 <a:ext uri="{FF2B5EF4-FFF2-40B4-BE49-F238E27FC236}">
-                  <a16:creationId xmlns:a16="http://schemas.microsoft.com/office/drawing/2014/main" xmlns="" id="{E34657F4-B723-034D-7D13-769984F51112}"/>
+                  <a16:creationId xmlns:a16="http://schemas.microsoft.com/office/drawing/2014/main" id="{E34657F4-B723-034D-7D13-769984F51112}"/>
                 </a:ext>
               </a:extLst>
             </p:cNvPr>
@@ -21969,7 +21935,7 @@
             <p:cNvPr id="117" name="Rectangle 5">
               <a:extLst>
                 <a:ext uri="{FF2B5EF4-FFF2-40B4-BE49-F238E27FC236}">
-                  <a16:creationId xmlns:a16="http://schemas.microsoft.com/office/drawing/2014/main" xmlns="" id="{A691B82E-3F82-01BC-5F9C-E1CB73EB6138}"/>
+                  <a16:creationId xmlns:a16="http://schemas.microsoft.com/office/drawing/2014/main" id="{A691B82E-3F82-01BC-5F9C-E1CB73EB6138}"/>
                 </a:ext>
               </a:extLst>
             </p:cNvPr>
@@ -22028,7 +21994,7 @@
             <p:cNvPr id="118" name="Rectangle 8">
               <a:extLst>
                 <a:ext uri="{FF2B5EF4-FFF2-40B4-BE49-F238E27FC236}">
-                  <a16:creationId xmlns:a16="http://schemas.microsoft.com/office/drawing/2014/main" xmlns="" id="{89458F61-2C10-C1F5-FD03-593C64A3592E}"/>
+                  <a16:creationId xmlns:a16="http://schemas.microsoft.com/office/drawing/2014/main" id="{89458F61-2C10-C1F5-FD03-593C64A3592E}"/>
                 </a:ext>
               </a:extLst>
             </p:cNvPr>
@@ -22087,7 +22053,7 @@
             <p:cNvPr id="119" name="Rectangle 9">
               <a:extLst>
                 <a:ext uri="{FF2B5EF4-FFF2-40B4-BE49-F238E27FC236}">
-                  <a16:creationId xmlns:a16="http://schemas.microsoft.com/office/drawing/2014/main" xmlns="" id="{C0E3A58A-B8F4-7AB5-1AC8-1DE144FF8239}"/>
+                  <a16:creationId xmlns:a16="http://schemas.microsoft.com/office/drawing/2014/main" id="{C0E3A58A-B8F4-7AB5-1AC8-1DE144FF8239}"/>
                 </a:ext>
               </a:extLst>
             </p:cNvPr>
@@ -22146,7 +22112,7 @@
             <p:cNvPr id="120" name="Rectangle 10">
               <a:extLst>
                 <a:ext uri="{FF2B5EF4-FFF2-40B4-BE49-F238E27FC236}">
-                  <a16:creationId xmlns:a16="http://schemas.microsoft.com/office/drawing/2014/main" xmlns="" id="{90EBC5F5-94D6-2923-BA57-6C40C112089F}"/>
+                  <a16:creationId xmlns:a16="http://schemas.microsoft.com/office/drawing/2014/main" id="{90EBC5F5-94D6-2923-BA57-6C40C112089F}"/>
                 </a:ext>
               </a:extLst>
             </p:cNvPr>
@@ -22205,7 +22171,7 @@
             <p:cNvPr id="121" name="Rectangle 4">
               <a:extLst>
                 <a:ext uri="{FF2B5EF4-FFF2-40B4-BE49-F238E27FC236}">
-                  <a16:creationId xmlns:a16="http://schemas.microsoft.com/office/drawing/2014/main" xmlns="" id="{D5FF1B52-A1F2-6E41-CE8C-230CB0458A73}"/>
+                  <a16:creationId xmlns:a16="http://schemas.microsoft.com/office/drawing/2014/main" id="{D5FF1B52-A1F2-6E41-CE8C-230CB0458A73}"/>
                 </a:ext>
               </a:extLst>
             </p:cNvPr>
@@ -22264,7 +22230,7 @@
             <p:cNvPr id="122" name="Rectangle 5">
               <a:extLst>
                 <a:ext uri="{FF2B5EF4-FFF2-40B4-BE49-F238E27FC236}">
-                  <a16:creationId xmlns:a16="http://schemas.microsoft.com/office/drawing/2014/main" xmlns="" id="{7B596C9D-8FF0-2BAF-6C5E-BC4E4AA5BF32}"/>
+                  <a16:creationId xmlns:a16="http://schemas.microsoft.com/office/drawing/2014/main" id="{7B596C9D-8FF0-2BAF-6C5E-BC4E4AA5BF32}"/>
                 </a:ext>
               </a:extLst>
             </p:cNvPr>
@@ -22323,7 +22289,7 @@
             <p:cNvPr id="123" name="Rectangle 8">
               <a:extLst>
                 <a:ext uri="{FF2B5EF4-FFF2-40B4-BE49-F238E27FC236}">
-                  <a16:creationId xmlns:a16="http://schemas.microsoft.com/office/drawing/2014/main" xmlns="" id="{6A67D423-1040-7920-8AA4-5C3704D73ECA}"/>
+                  <a16:creationId xmlns:a16="http://schemas.microsoft.com/office/drawing/2014/main" id="{6A67D423-1040-7920-8AA4-5C3704D73ECA}"/>
                 </a:ext>
               </a:extLst>
             </p:cNvPr>
@@ -22382,7 +22348,7 @@
             <p:cNvPr id="124" name="Rectangle 9">
               <a:extLst>
                 <a:ext uri="{FF2B5EF4-FFF2-40B4-BE49-F238E27FC236}">
-                  <a16:creationId xmlns:a16="http://schemas.microsoft.com/office/drawing/2014/main" xmlns="" id="{4FBF95DD-988A-B7C0-980F-7695A3B10707}"/>
+                  <a16:creationId xmlns:a16="http://schemas.microsoft.com/office/drawing/2014/main" id="{4FBF95DD-988A-B7C0-980F-7695A3B10707}"/>
                 </a:ext>
               </a:extLst>
             </p:cNvPr>
@@ -22441,7 +22407,7 @@
             <p:cNvPr id="125" name="Rectangle 10">
               <a:extLst>
                 <a:ext uri="{FF2B5EF4-FFF2-40B4-BE49-F238E27FC236}">
-                  <a16:creationId xmlns:a16="http://schemas.microsoft.com/office/drawing/2014/main" xmlns="" id="{D44CF25F-2CA8-E46D-71BB-11CA83AA26ED}"/>
+                  <a16:creationId xmlns:a16="http://schemas.microsoft.com/office/drawing/2014/main" id="{D44CF25F-2CA8-E46D-71BB-11CA83AA26ED}"/>
                 </a:ext>
               </a:extLst>
             </p:cNvPr>
@@ -22500,7 +22466,7 @@
             <p:cNvPr id="126" name="Rectangle 4">
               <a:extLst>
                 <a:ext uri="{FF2B5EF4-FFF2-40B4-BE49-F238E27FC236}">
-                  <a16:creationId xmlns:a16="http://schemas.microsoft.com/office/drawing/2014/main" xmlns="" id="{F371D882-BAE5-5754-CF03-2EE77FAB6B36}"/>
+                  <a16:creationId xmlns:a16="http://schemas.microsoft.com/office/drawing/2014/main" id="{F371D882-BAE5-5754-CF03-2EE77FAB6B36}"/>
                 </a:ext>
               </a:extLst>
             </p:cNvPr>
@@ -22559,7 +22525,7 @@
             <p:cNvPr id="127" name="Rectangle 5">
               <a:extLst>
                 <a:ext uri="{FF2B5EF4-FFF2-40B4-BE49-F238E27FC236}">
-                  <a16:creationId xmlns:a16="http://schemas.microsoft.com/office/drawing/2014/main" xmlns="" id="{21B3ED27-5C00-3039-8FBB-2378DF065F5D}"/>
+                  <a16:creationId xmlns:a16="http://schemas.microsoft.com/office/drawing/2014/main" id="{21B3ED27-5C00-3039-8FBB-2378DF065F5D}"/>
                 </a:ext>
               </a:extLst>
             </p:cNvPr>
@@ -22618,7 +22584,7 @@
             <p:cNvPr id="128" name="Rectangle 8">
               <a:extLst>
                 <a:ext uri="{FF2B5EF4-FFF2-40B4-BE49-F238E27FC236}">
-                  <a16:creationId xmlns:a16="http://schemas.microsoft.com/office/drawing/2014/main" xmlns="" id="{FB627EC2-37F9-8E2D-84ED-827449B79EB0}"/>
+                  <a16:creationId xmlns:a16="http://schemas.microsoft.com/office/drawing/2014/main" id="{FB627EC2-37F9-8E2D-84ED-827449B79EB0}"/>
                 </a:ext>
               </a:extLst>
             </p:cNvPr>
@@ -22677,7 +22643,7 @@
             <p:cNvPr id="129" name="Rectangle 9">
               <a:extLst>
                 <a:ext uri="{FF2B5EF4-FFF2-40B4-BE49-F238E27FC236}">
-                  <a16:creationId xmlns:a16="http://schemas.microsoft.com/office/drawing/2014/main" xmlns="" id="{66331C35-C7BA-9465-E834-E750025CCA6C}"/>
+                  <a16:creationId xmlns:a16="http://schemas.microsoft.com/office/drawing/2014/main" id="{66331C35-C7BA-9465-E834-E750025CCA6C}"/>
                 </a:ext>
               </a:extLst>
             </p:cNvPr>
@@ -22736,7 +22702,7 @@
             <p:cNvPr id="130" name="Rectangle 10">
               <a:extLst>
                 <a:ext uri="{FF2B5EF4-FFF2-40B4-BE49-F238E27FC236}">
-                  <a16:creationId xmlns:a16="http://schemas.microsoft.com/office/drawing/2014/main" xmlns="" id="{BDB07790-E921-42D6-6287-DD170A52FEA7}"/>
+                  <a16:creationId xmlns:a16="http://schemas.microsoft.com/office/drawing/2014/main" id="{BDB07790-E921-42D6-6287-DD170A52FEA7}"/>
                 </a:ext>
               </a:extLst>
             </p:cNvPr>
@@ -22795,7 +22761,7 @@
             <p:cNvPr id="131" name="Rectangle 4">
               <a:extLst>
                 <a:ext uri="{FF2B5EF4-FFF2-40B4-BE49-F238E27FC236}">
-                  <a16:creationId xmlns:a16="http://schemas.microsoft.com/office/drawing/2014/main" xmlns="" id="{E4CE89B7-672C-10F1-9209-E2D8E36EA448}"/>
+                  <a16:creationId xmlns:a16="http://schemas.microsoft.com/office/drawing/2014/main" id="{E4CE89B7-672C-10F1-9209-E2D8E36EA448}"/>
                 </a:ext>
               </a:extLst>
             </p:cNvPr>
@@ -22854,7 +22820,7 @@
             <p:cNvPr id="132" name="Rectangle 5">
               <a:extLst>
                 <a:ext uri="{FF2B5EF4-FFF2-40B4-BE49-F238E27FC236}">
-                  <a16:creationId xmlns:a16="http://schemas.microsoft.com/office/drawing/2014/main" xmlns="" id="{32EFEACD-1583-CAF2-69EE-23FDF28E5A41}"/>
+                  <a16:creationId xmlns:a16="http://schemas.microsoft.com/office/drawing/2014/main" id="{32EFEACD-1583-CAF2-69EE-23FDF28E5A41}"/>
                 </a:ext>
               </a:extLst>
             </p:cNvPr>
@@ -22913,7 +22879,7 @@
             <p:cNvPr id="133" name="Rectangle 8">
               <a:extLst>
                 <a:ext uri="{FF2B5EF4-FFF2-40B4-BE49-F238E27FC236}">
-                  <a16:creationId xmlns:a16="http://schemas.microsoft.com/office/drawing/2014/main" xmlns="" id="{9CFE3827-D689-F333-6BE6-DC1F3B258FA0}"/>
+                  <a16:creationId xmlns:a16="http://schemas.microsoft.com/office/drawing/2014/main" id="{9CFE3827-D689-F333-6BE6-DC1F3B258FA0}"/>
                 </a:ext>
               </a:extLst>
             </p:cNvPr>
@@ -22972,7 +22938,7 @@
             <p:cNvPr id="134" name="Rectangle 9">
               <a:extLst>
                 <a:ext uri="{FF2B5EF4-FFF2-40B4-BE49-F238E27FC236}">
-                  <a16:creationId xmlns:a16="http://schemas.microsoft.com/office/drawing/2014/main" xmlns="" id="{9BFFAB0F-615C-34B0-2470-742EB7CDE2DC}"/>
+                  <a16:creationId xmlns:a16="http://schemas.microsoft.com/office/drawing/2014/main" id="{9BFFAB0F-615C-34B0-2470-742EB7CDE2DC}"/>
                 </a:ext>
               </a:extLst>
             </p:cNvPr>
@@ -23031,7 +22997,7 @@
             <p:cNvPr id="135" name="Rectangle 10">
               <a:extLst>
                 <a:ext uri="{FF2B5EF4-FFF2-40B4-BE49-F238E27FC236}">
-                  <a16:creationId xmlns:a16="http://schemas.microsoft.com/office/drawing/2014/main" xmlns="" id="{147EFC36-E54A-4111-5D94-058B6277810D}"/>
+                  <a16:creationId xmlns:a16="http://schemas.microsoft.com/office/drawing/2014/main" id="{147EFC36-E54A-4111-5D94-058B6277810D}"/>
                 </a:ext>
               </a:extLst>
             </p:cNvPr>
@@ -23090,7 +23056,7 @@
             <p:cNvPr id="136" name="Rectangle 4">
               <a:extLst>
                 <a:ext uri="{FF2B5EF4-FFF2-40B4-BE49-F238E27FC236}">
-                  <a16:creationId xmlns:a16="http://schemas.microsoft.com/office/drawing/2014/main" xmlns="" id="{57980908-1B66-4125-4310-A35677123EF6}"/>
+                  <a16:creationId xmlns:a16="http://schemas.microsoft.com/office/drawing/2014/main" id="{57980908-1B66-4125-4310-A35677123EF6}"/>
                 </a:ext>
               </a:extLst>
             </p:cNvPr>
@@ -23149,7 +23115,7 @@
             <p:cNvPr id="137" name="Rectangle 5">
               <a:extLst>
                 <a:ext uri="{FF2B5EF4-FFF2-40B4-BE49-F238E27FC236}">
-                  <a16:creationId xmlns:a16="http://schemas.microsoft.com/office/drawing/2014/main" xmlns="" id="{A4F7360C-BE80-68FC-CBCD-6C6EA3499568}"/>
+                  <a16:creationId xmlns:a16="http://schemas.microsoft.com/office/drawing/2014/main" id="{A4F7360C-BE80-68FC-CBCD-6C6EA3499568}"/>
                 </a:ext>
               </a:extLst>
             </p:cNvPr>
@@ -23208,7 +23174,7 @@
             <p:cNvPr id="138" name="Rectangle 8">
               <a:extLst>
                 <a:ext uri="{FF2B5EF4-FFF2-40B4-BE49-F238E27FC236}">
-                  <a16:creationId xmlns:a16="http://schemas.microsoft.com/office/drawing/2014/main" xmlns="" id="{3D7A565F-26D4-8F7A-DB39-DACCF7C301CB}"/>
+                  <a16:creationId xmlns:a16="http://schemas.microsoft.com/office/drawing/2014/main" id="{3D7A565F-26D4-8F7A-DB39-DACCF7C301CB}"/>
                 </a:ext>
               </a:extLst>
             </p:cNvPr>
@@ -23267,7 +23233,7 @@
             <p:cNvPr id="139" name="Rectangle 9">
               <a:extLst>
                 <a:ext uri="{FF2B5EF4-FFF2-40B4-BE49-F238E27FC236}">
-                  <a16:creationId xmlns:a16="http://schemas.microsoft.com/office/drawing/2014/main" xmlns="" id="{FEF6B429-FA2B-4089-C432-A5D4EAA23A98}"/>
+                  <a16:creationId xmlns:a16="http://schemas.microsoft.com/office/drawing/2014/main" id="{FEF6B429-FA2B-4089-C432-A5D4EAA23A98}"/>
                 </a:ext>
               </a:extLst>
             </p:cNvPr>
@@ -23326,7 +23292,7 @@
             <p:cNvPr id="140" name="Rectangle 10">
               <a:extLst>
                 <a:ext uri="{FF2B5EF4-FFF2-40B4-BE49-F238E27FC236}">
-                  <a16:creationId xmlns:a16="http://schemas.microsoft.com/office/drawing/2014/main" xmlns="" id="{CB701250-BAFE-5260-A8DF-24B3BDCD9E5C}"/>
+                  <a16:creationId xmlns:a16="http://schemas.microsoft.com/office/drawing/2014/main" id="{CB701250-BAFE-5260-A8DF-24B3BDCD9E5C}"/>
                 </a:ext>
               </a:extLst>
             </p:cNvPr>
@@ -23385,7 +23351,7 @@
             <p:cNvPr id="141" name="Rectangle 4">
               <a:extLst>
                 <a:ext uri="{FF2B5EF4-FFF2-40B4-BE49-F238E27FC236}">
-                  <a16:creationId xmlns:a16="http://schemas.microsoft.com/office/drawing/2014/main" xmlns="" id="{C010C686-F239-6F99-5B46-F499853F58CC}"/>
+                  <a16:creationId xmlns:a16="http://schemas.microsoft.com/office/drawing/2014/main" id="{C010C686-F239-6F99-5B46-F499853F58CC}"/>
                 </a:ext>
               </a:extLst>
             </p:cNvPr>
@@ -23444,7 +23410,7 @@
             <p:cNvPr id="142" name="Rectangle 5">
               <a:extLst>
                 <a:ext uri="{FF2B5EF4-FFF2-40B4-BE49-F238E27FC236}">
-                  <a16:creationId xmlns:a16="http://schemas.microsoft.com/office/drawing/2014/main" xmlns="" id="{A6FE1FC9-B91C-C2CC-5B4E-06A4D657D0BC}"/>
+                  <a16:creationId xmlns:a16="http://schemas.microsoft.com/office/drawing/2014/main" id="{A6FE1FC9-B91C-C2CC-5B4E-06A4D657D0BC}"/>
                 </a:ext>
               </a:extLst>
             </p:cNvPr>
@@ -23503,7 +23469,7 @@
             <p:cNvPr id="143" name="Rectangle 8">
               <a:extLst>
                 <a:ext uri="{FF2B5EF4-FFF2-40B4-BE49-F238E27FC236}">
-                  <a16:creationId xmlns:a16="http://schemas.microsoft.com/office/drawing/2014/main" xmlns="" id="{58604601-12D5-F90E-32F7-F170315A17EA}"/>
+                  <a16:creationId xmlns:a16="http://schemas.microsoft.com/office/drawing/2014/main" id="{58604601-12D5-F90E-32F7-F170315A17EA}"/>
                 </a:ext>
               </a:extLst>
             </p:cNvPr>
@@ -23562,7 +23528,7 @@
             <p:cNvPr id="144" name="Rectangle 9">
               <a:extLst>
                 <a:ext uri="{FF2B5EF4-FFF2-40B4-BE49-F238E27FC236}">
-                  <a16:creationId xmlns:a16="http://schemas.microsoft.com/office/drawing/2014/main" xmlns="" id="{1E4DB558-AF7E-B95E-D0AD-37B5BCCC323F}"/>
+                  <a16:creationId xmlns:a16="http://schemas.microsoft.com/office/drawing/2014/main" id="{1E4DB558-AF7E-B95E-D0AD-37B5BCCC323F}"/>
                 </a:ext>
               </a:extLst>
             </p:cNvPr>
@@ -23621,7 +23587,7 @@
             <p:cNvPr id="145" name="Rectangle 10">
               <a:extLst>
                 <a:ext uri="{FF2B5EF4-FFF2-40B4-BE49-F238E27FC236}">
-                  <a16:creationId xmlns:a16="http://schemas.microsoft.com/office/drawing/2014/main" xmlns="" id="{A0666BA4-14CA-6E6A-A52E-F1D8E49A35A2}"/>
+                  <a16:creationId xmlns:a16="http://schemas.microsoft.com/office/drawing/2014/main" id="{A0666BA4-14CA-6E6A-A52E-F1D8E49A35A2}"/>
                 </a:ext>
               </a:extLst>
             </p:cNvPr>
@@ -23680,7 +23646,7 @@
             <p:cNvPr id="146" name="Rectangle 4">
               <a:extLst>
                 <a:ext uri="{FF2B5EF4-FFF2-40B4-BE49-F238E27FC236}">
-                  <a16:creationId xmlns:a16="http://schemas.microsoft.com/office/drawing/2014/main" xmlns="" id="{09CC9A1C-0FF5-DA8D-9B81-D2E78337E476}"/>
+                  <a16:creationId xmlns:a16="http://schemas.microsoft.com/office/drawing/2014/main" id="{09CC9A1C-0FF5-DA8D-9B81-D2E78337E476}"/>
                 </a:ext>
               </a:extLst>
             </p:cNvPr>
@@ -23739,7 +23705,7 @@
             <p:cNvPr id="147" name="Rectangle 5">
               <a:extLst>
                 <a:ext uri="{FF2B5EF4-FFF2-40B4-BE49-F238E27FC236}">
-                  <a16:creationId xmlns:a16="http://schemas.microsoft.com/office/drawing/2014/main" xmlns="" id="{3CF680CF-E2FC-EFFB-6AE7-F826C7856EB2}"/>
+                  <a16:creationId xmlns:a16="http://schemas.microsoft.com/office/drawing/2014/main" id="{3CF680CF-E2FC-EFFB-6AE7-F826C7856EB2}"/>
                 </a:ext>
               </a:extLst>
             </p:cNvPr>
@@ -23798,7 +23764,7 @@
             <p:cNvPr id="148" name="Rectangle 8">
               <a:extLst>
                 <a:ext uri="{FF2B5EF4-FFF2-40B4-BE49-F238E27FC236}">
-                  <a16:creationId xmlns:a16="http://schemas.microsoft.com/office/drawing/2014/main" xmlns="" id="{AD075D0B-8562-6A6D-01EC-69388594C105}"/>
+                  <a16:creationId xmlns:a16="http://schemas.microsoft.com/office/drawing/2014/main" id="{AD075D0B-8562-6A6D-01EC-69388594C105}"/>
                 </a:ext>
               </a:extLst>
             </p:cNvPr>
@@ -23857,7 +23823,7 @@
             <p:cNvPr id="149" name="Rectangle 9">
               <a:extLst>
                 <a:ext uri="{FF2B5EF4-FFF2-40B4-BE49-F238E27FC236}">
-                  <a16:creationId xmlns:a16="http://schemas.microsoft.com/office/drawing/2014/main" xmlns="" id="{CBC0E90D-5498-5DC2-A9E5-3206EE5E5824}"/>
+                  <a16:creationId xmlns:a16="http://schemas.microsoft.com/office/drawing/2014/main" id="{CBC0E90D-5498-5DC2-A9E5-3206EE5E5824}"/>
                 </a:ext>
               </a:extLst>
             </p:cNvPr>
@@ -23916,7 +23882,7 @@
             <p:cNvPr id="150" name="Rectangle 10">
               <a:extLst>
                 <a:ext uri="{FF2B5EF4-FFF2-40B4-BE49-F238E27FC236}">
-                  <a16:creationId xmlns:a16="http://schemas.microsoft.com/office/drawing/2014/main" xmlns="" id="{43215DC0-4AF1-DBA1-C550-99928887A67E}"/>
+                  <a16:creationId xmlns:a16="http://schemas.microsoft.com/office/drawing/2014/main" id="{43215DC0-4AF1-DBA1-C550-99928887A67E}"/>
                 </a:ext>
               </a:extLst>
             </p:cNvPr>
@@ -23975,7 +23941,7 @@
             <p:cNvPr id="151" name="Rectangle 4">
               <a:extLst>
                 <a:ext uri="{FF2B5EF4-FFF2-40B4-BE49-F238E27FC236}">
-                  <a16:creationId xmlns:a16="http://schemas.microsoft.com/office/drawing/2014/main" xmlns="" id="{93B8FC98-9E58-4015-63F9-1F72AEF57E26}"/>
+                  <a16:creationId xmlns:a16="http://schemas.microsoft.com/office/drawing/2014/main" id="{93B8FC98-9E58-4015-63F9-1F72AEF57E26}"/>
                 </a:ext>
               </a:extLst>
             </p:cNvPr>
@@ -24034,7 +24000,7 @@
             <p:cNvPr id="152" name="Rectangle 5">
               <a:extLst>
                 <a:ext uri="{FF2B5EF4-FFF2-40B4-BE49-F238E27FC236}">
-                  <a16:creationId xmlns:a16="http://schemas.microsoft.com/office/drawing/2014/main" xmlns="" id="{FB2F67C9-DE08-FDBD-0D2B-CCD63210458A}"/>
+                  <a16:creationId xmlns:a16="http://schemas.microsoft.com/office/drawing/2014/main" id="{FB2F67C9-DE08-FDBD-0D2B-CCD63210458A}"/>
                 </a:ext>
               </a:extLst>
             </p:cNvPr>
@@ -24093,7 +24059,7 @@
             <p:cNvPr id="153" name="Rectangle 8">
               <a:extLst>
                 <a:ext uri="{FF2B5EF4-FFF2-40B4-BE49-F238E27FC236}">
-                  <a16:creationId xmlns:a16="http://schemas.microsoft.com/office/drawing/2014/main" xmlns="" id="{74AAC2BF-15F1-691A-9D58-52609BA83861}"/>
+                  <a16:creationId xmlns:a16="http://schemas.microsoft.com/office/drawing/2014/main" id="{74AAC2BF-15F1-691A-9D58-52609BA83861}"/>
                 </a:ext>
               </a:extLst>
             </p:cNvPr>
@@ -24152,7 +24118,7 @@
             <p:cNvPr id="154" name="Rectangle 9">
               <a:extLst>
                 <a:ext uri="{FF2B5EF4-FFF2-40B4-BE49-F238E27FC236}">
-                  <a16:creationId xmlns:a16="http://schemas.microsoft.com/office/drawing/2014/main" xmlns="" id="{8897FBCD-3F6C-43A1-4614-CDEE83265059}"/>
+                  <a16:creationId xmlns:a16="http://schemas.microsoft.com/office/drawing/2014/main" id="{8897FBCD-3F6C-43A1-4614-CDEE83265059}"/>
                 </a:ext>
               </a:extLst>
             </p:cNvPr>
@@ -24211,7 +24177,7 @@
             <p:cNvPr id="155" name="Rectangle 10">
               <a:extLst>
                 <a:ext uri="{FF2B5EF4-FFF2-40B4-BE49-F238E27FC236}">
-                  <a16:creationId xmlns:a16="http://schemas.microsoft.com/office/drawing/2014/main" xmlns="" id="{14D61FDA-20D5-0C1B-FE63-2A7C17AF4442}"/>
+                  <a16:creationId xmlns:a16="http://schemas.microsoft.com/office/drawing/2014/main" id="{14D61FDA-20D5-0C1B-FE63-2A7C17AF4442}"/>
                 </a:ext>
               </a:extLst>
             </p:cNvPr>
@@ -24270,7 +24236,7 @@
             <p:cNvPr id="156" name="Rectangle 4">
               <a:extLst>
                 <a:ext uri="{FF2B5EF4-FFF2-40B4-BE49-F238E27FC236}">
-                  <a16:creationId xmlns:a16="http://schemas.microsoft.com/office/drawing/2014/main" xmlns="" id="{425ED12E-E242-9E42-D403-2F97F01FA793}"/>
+                  <a16:creationId xmlns:a16="http://schemas.microsoft.com/office/drawing/2014/main" id="{425ED12E-E242-9E42-D403-2F97F01FA793}"/>
                 </a:ext>
               </a:extLst>
             </p:cNvPr>
@@ -24329,7 +24295,7 @@
             <p:cNvPr id="157" name="Rectangle 5">
               <a:extLst>
                 <a:ext uri="{FF2B5EF4-FFF2-40B4-BE49-F238E27FC236}">
-                  <a16:creationId xmlns:a16="http://schemas.microsoft.com/office/drawing/2014/main" xmlns="" id="{1147CE01-6118-6260-1635-E900E5BDD920}"/>
+                  <a16:creationId xmlns:a16="http://schemas.microsoft.com/office/drawing/2014/main" id="{1147CE01-6118-6260-1635-E900E5BDD920}"/>
                 </a:ext>
               </a:extLst>
             </p:cNvPr>
@@ -24388,7 +24354,7 @@
             <p:cNvPr id="158" name="Rectangle 8">
               <a:extLst>
                 <a:ext uri="{FF2B5EF4-FFF2-40B4-BE49-F238E27FC236}">
-                  <a16:creationId xmlns:a16="http://schemas.microsoft.com/office/drawing/2014/main" xmlns="" id="{2B8D66CE-FFB5-8460-A9AE-5AF2AC9B278C}"/>
+                  <a16:creationId xmlns:a16="http://schemas.microsoft.com/office/drawing/2014/main" id="{2B8D66CE-FFB5-8460-A9AE-5AF2AC9B278C}"/>
                 </a:ext>
               </a:extLst>
             </p:cNvPr>
@@ -24447,7 +24413,7 @@
             <p:cNvPr id="159" name="Rectangle 9">
               <a:extLst>
                 <a:ext uri="{FF2B5EF4-FFF2-40B4-BE49-F238E27FC236}">
-                  <a16:creationId xmlns:a16="http://schemas.microsoft.com/office/drawing/2014/main" xmlns="" id="{9FA177D9-5022-298C-0450-D4173F6E5568}"/>
+                  <a16:creationId xmlns:a16="http://schemas.microsoft.com/office/drawing/2014/main" id="{9FA177D9-5022-298C-0450-D4173F6E5568}"/>
                 </a:ext>
               </a:extLst>
             </p:cNvPr>
@@ -24506,7 +24472,7 @@
             <p:cNvPr id="160" name="Rectangle 10">
               <a:extLst>
                 <a:ext uri="{FF2B5EF4-FFF2-40B4-BE49-F238E27FC236}">
-                  <a16:creationId xmlns:a16="http://schemas.microsoft.com/office/drawing/2014/main" xmlns="" id="{6C56D40A-F72F-9CBE-DEE3-03882D197490}"/>
+                  <a16:creationId xmlns:a16="http://schemas.microsoft.com/office/drawing/2014/main" id="{6C56D40A-F72F-9CBE-DEE3-03882D197490}"/>
                 </a:ext>
               </a:extLst>
             </p:cNvPr>
@@ -24565,7 +24531,7 @@
             <p:cNvPr id="161" name="Rectangle 4">
               <a:extLst>
                 <a:ext uri="{FF2B5EF4-FFF2-40B4-BE49-F238E27FC236}">
-                  <a16:creationId xmlns:a16="http://schemas.microsoft.com/office/drawing/2014/main" xmlns="" id="{A76252EB-725A-AA26-F74C-5F42BD8F37FC}"/>
+                  <a16:creationId xmlns:a16="http://schemas.microsoft.com/office/drawing/2014/main" id="{A76252EB-725A-AA26-F74C-5F42BD8F37FC}"/>
                 </a:ext>
               </a:extLst>
             </p:cNvPr>
@@ -24624,7 +24590,7 @@
             <p:cNvPr id="162" name="Rectangle 5">
               <a:extLst>
                 <a:ext uri="{FF2B5EF4-FFF2-40B4-BE49-F238E27FC236}">
-                  <a16:creationId xmlns:a16="http://schemas.microsoft.com/office/drawing/2014/main" xmlns="" id="{4139510D-32DB-BF06-F4DD-7FD20676BBB8}"/>
+                  <a16:creationId xmlns:a16="http://schemas.microsoft.com/office/drawing/2014/main" id="{4139510D-32DB-BF06-F4DD-7FD20676BBB8}"/>
                 </a:ext>
               </a:extLst>
             </p:cNvPr>
@@ -24683,7 +24649,7 @@
             <p:cNvPr id="163" name="Rectangle 8">
               <a:extLst>
                 <a:ext uri="{FF2B5EF4-FFF2-40B4-BE49-F238E27FC236}">
-                  <a16:creationId xmlns:a16="http://schemas.microsoft.com/office/drawing/2014/main" xmlns="" id="{77991953-00B7-8432-FE0F-B63DB489F1CC}"/>
+                  <a16:creationId xmlns:a16="http://schemas.microsoft.com/office/drawing/2014/main" id="{77991953-00B7-8432-FE0F-B63DB489F1CC}"/>
                 </a:ext>
               </a:extLst>
             </p:cNvPr>
@@ -24742,7 +24708,7 @@
             <p:cNvPr id="164" name="Rectangle 9">
               <a:extLst>
                 <a:ext uri="{FF2B5EF4-FFF2-40B4-BE49-F238E27FC236}">
-                  <a16:creationId xmlns:a16="http://schemas.microsoft.com/office/drawing/2014/main" xmlns="" id="{D4747C93-8FF4-2165-319B-2C8A1D28319C}"/>
+                  <a16:creationId xmlns:a16="http://schemas.microsoft.com/office/drawing/2014/main" id="{D4747C93-8FF4-2165-319B-2C8A1D28319C}"/>
                 </a:ext>
               </a:extLst>
             </p:cNvPr>
@@ -24801,7 +24767,7 @@
             <p:cNvPr id="165" name="Rectangle 10">
               <a:extLst>
                 <a:ext uri="{FF2B5EF4-FFF2-40B4-BE49-F238E27FC236}">
-                  <a16:creationId xmlns:a16="http://schemas.microsoft.com/office/drawing/2014/main" xmlns="" id="{A9D6C350-586E-A8A8-8C3D-8E61F1F13782}"/>
+                  <a16:creationId xmlns:a16="http://schemas.microsoft.com/office/drawing/2014/main" id="{A9D6C350-586E-A8A8-8C3D-8E61F1F13782}"/>
                 </a:ext>
               </a:extLst>
             </p:cNvPr>
@@ -24860,7 +24826,7 @@
             <p:cNvPr id="166" name="Rectangle 36">
               <a:extLst>
                 <a:ext uri="{FF2B5EF4-FFF2-40B4-BE49-F238E27FC236}">
-                  <a16:creationId xmlns:a16="http://schemas.microsoft.com/office/drawing/2014/main" xmlns="" id="{DC72F554-684F-568F-381D-6136A58CC413}"/>
+                  <a16:creationId xmlns:a16="http://schemas.microsoft.com/office/drawing/2014/main" id="{DC72F554-684F-568F-381D-6136A58CC413}"/>
                 </a:ext>
               </a:extLst>
             </p:cNvPr>
@@ -24894,7 +24860,7 @@
             <p:cNvPr id="167" name="Rectangle 36">
               <a:extLst>
                 <a:ext uri="{FF2B5EF4-FFF2-40B4-BE49-F238E27FC236}">
-                  <a16:creationId xmlns:a16="http://schemas.microsoft.com/office/drawing/2014/main" xmlns="" id="{9DD9DC18-3337-285E-E1E4-6D19CF59BD0A}"/>
+                  <a16:creationId xmlns:a16="http://schemas.microsoft.com/office/drawing/2014/main" id="{9DD9DC18-3337-285E-E1E4-6D19CF59BD0A}"/>
                 </a:ext>
               </a:extLst>
             </p:cNvPr>
@@ -24928,7 +24894,7 @@
             <p:cNvPr id="168" name="Rectangle 36">
               <a:extLst>
                 <a:ext uri="{FF2B5EF4-FFF2-40B4-BE49-F238E27FC236}">
-                  <a16:creationId xmlns:a16="http://schemas.microsoft.com/office/drawing/2014/main" xmlns="" id="{3DC36A96-8AF6-CFA0-CD37-9C2778EAD355}"/>
+                  <a16:creationId xmlns:a16="http://schemas.microsoft.com/office/drawing/2014/main" id="{3DC36A96-8AF6-CFA0-CD37-9C2778EAD355}"/>
                 </a:ext>
               </a:extLst>
             </p:cNvPr>
@@ -24962,7 +24928,7 @@
             <p:cNvPr id="169" name="Rectangle 36">
               <a:extLst>
                 <a:ext uri="{FF2B5EF4-FFF2-40B4-BE49-F238E27FC236}">
-                  <a16:creationId xmlns:a16="http://schemas.microsoft.com/office/drawing/2014/main" xmlns="" id="{02C99D41-A08C-CE6C-57A5-58FE911361CE}"/>
+                  <a16:creationId xmlns:a16="http://schemas.microsoft.com/office/drawing/2014/main" id="{02C99D41-A08C-CE6C-57A5-58FE911361CE}"/>
                 </a:ext>
               </a:extLst>
             </p:cNvPr>
@@ -24996,7 +24962,7 @@
             <p:cNvPr id="170" name="Rectangle 36">
               <a:extLst>
                 <a:ext uri="{FF2B5EF4-FFF2-40B4-BE49-F238E27FC236}">
-                  <a16:creationId xmlns:a16="http://schemas.microsoft.com/office/drawing/2014/main" xmlns="" id="{8EF1154B-FF44-17A9-9E88-0B824CD664E7}"/>
+                  <a16:creationId xmlns:a16="http://schemas.microsoft.com/office/drawing/2014/main" id="{8EF1154B-FF44-17A9-9E88-0B824CD664E7}"/>
                 </a:ext>
               </a:extLst>
             </p:cNvPr>
@@ -25431,7 +25397,7 @@
           <p:cNvPr id="2" name="Título 1">
             <a:extLst>
               <a:ext uri="{FF2B5EF4-FFF2-40B4-BE49-F238E27FC236}">
-                <a16:creationId xmlns:a16="http://schemas.microsoft.com/office/drawing/2014/main" xmlns="" id="{F18B2949-AA2A-78BE-831B-67A7AE5AB555}"/>
+                <a16:creationId xmlns:a16="http://schemas.microsoft.com/office/drawing/2014/main" id="{F18B2949-AA2A-78BE-831B-67A7AE5AB555}"/>
               </a:ext>
             </a:extLst>
           </p:cNvPr>
@@ -25459,7 +25425,7 @@
           <p:cNvPr id="3" name="Espaço Reservado para Conteúdo 2">
             <a:extLst>
               <a:ext uri="{FF2B5EF4-FFF2-40B4-BE49-F238E27FC236}">
-                <a16:creationId xmlns:a16="http://schemas.microsoft.com/office/drawing/2014/main" xmlns="" id="{945F73D8-097B-0F49-0490-91BBF0A6A45E}"/>
+                <a16:creationId xmlns:a16="http://schemas.microsoft.com/office/drawing/2014/main" id="{945F73D8-097B-0F49-0490-91BBF0A6A45E}"/>
               </a:ext>
             </a:extLst>
           </p:cNvPr>
@@ -25734,7 +25700,7 @@
           <p:cNvPr id="2" name="Título 1">
             <a:extLst>
               <a:ext uri="{FF2B5EF4-FFF2-40B4-BE49-F238E27FC236}">
-                <a16:creationId xmlns:a16="http://schemas.microsoft.com/office/drawing/2014/main" xmlns="" id="{E0053A0A-FF84-5176-6AB3-C461B7BCB8CA}"/>
+                <a16:creationId xmlns:a16="http://schemas.microsoft.com/office/drawing/2014/main" id="{E0053A0A-FF84-5176-6AB3-C461B7BCB8CA}"/>
               </a:ext>
             </a:extLst>
           </p:cNvPr>
@@ -25762,7 +25728,7 @@
           <p:cNvPr id="3" name="Espaço Reservado para Conteúdo 2">
             <a:extLst>
               <a:ext uri="{FF2B5EF4-FFF2-40B4-BE49-F238E27FC236}">
-                <a16:creationId xmlns:a16="http://schemas.microsoft.com/office/drawing/2014/main" xmlns="" id="{A191BF4C-9AB1-8D9D-C795-058F9A528591}"/>
+                <a16:creationId xmlns:a16="http://schemas.microsoft.com/office/drawing/2014/main" id="{A191BF4C-9AB1-8D9D-C795-058F9A528591}"/>
               </a:ext>
             </a:extLst>
           </p:cNvPr>
@@ -26055,7 +26021,7 @@
           <p:cNvPr id="2" name="Título 1">
             <a:extLst>
               <a:ext uri="{FF2B5EF4-FFF2-40B4-BE49-F238E27FC236}">
-                <a16:creationId xmlns:a16="http://schemas.microsoft.com/office/drawing/2014/main" xmlns="" id="{AC595774-B841-7E8F-A35A-BAB395D69A08}"/>
+                <a16:creationId xmlns:a16="http://schemas.microsoft.com/office/drawing/2014/main" id="{AC595774-B841-7E8F-A35A-BAB395D69A08}"/>
               </a:ext>
             </a:extLst>
           </p:cNvPr>
@@ -26085,7 +26051,7 @@
               <p:cNvPr id="3" name="Espaço Reservado para Conteúdo 2">
                 <a:extLst>
                   <a:ext uri="{FF2B5EF4-FFF2-40B4-BE49-F238E27FC236}">
-                    <a16:creationId xmlns:a16="http://schemas.microsoft.com/office/drawing/2014/main" xmlns="" id="{A9594690-2CA5-0A2D-98E4-C4ACDD16B0DC}"/>
+                    <a16:creationId xmlns:a16="http://schemas.microsoft.com/office/drawing/2014/main" id="{A9594690-2CA5-0A2D-98E4-C4ACDD16B0DC}"/>
                   </a:ext>
                 </a:extLst>
               </p:cNvPr>
@@ -26300,7 +26266,7 @@
           <p:cNvPr id="2" name="Título 1">
             <a:extLst>
               <a:ext uri="{FF2B5EF4-FFF2-40B4-BE49-F238E27FC236}">
-                <a16:creationId xmlns:a16="http://schemas.microsoft.com/office/drawing/2014/main" xmlns="" id="{868D5143-C411-ADCB-BAB7-E5B85E844096}"/>
+                <a16:creationId xmlns:a16="http://schemas.microsoft.com/office/drawing/2014/main" id="{868D5143-C411-ADCB-BAB7-E5B85E844096}"/>
               </a:ext>
             </a:extLst>
           </p:cNvPr>
@@ -26328,7 +26294,7 @@
           <p:cNvPr id="3" name="Espaço Reservado para Conteúdo 2">
             <a:extLst>
               <a:ext uri="{FF2B5EF4-FFF2-40B4-BE49-F238E27FC236}">
-                <a16:creationId xmlns:a16="http://schemas.microsoft.com/office/drawing/2014/main" xmlns="" id="{CB85C345-8ED8-0184-A482-752AE4C0A4C6}"/>
+                <a16:creationId xmlns:a16="http://schemas.microsoft.com/office/drawing/2014/main" id="{CB85C345-8ED8-0184-A482-752AE4C0A4C6}"/>
               </a:ext>
             </a:extLst>
           </p:cNvPr>
@@ -26441,7 +26407,7 @@
           <p:cNvPr id="4" name="Picture 3">
             <a:extLst>
               <a:ext uri="{FF2B5EF4-FFF2-40B4-BE49-F238E27FC236}">
-                <a16:creationId xmlns:a16="http://schemas.microsoft.com/office/drawing/2014/main" xmlns="" id="{5E9F635D-DF29-C667-710E-2D22038C6B43}"/>
+                <a16:creationId xmlns:a16="http://schemas.microsoft.com/office/drawing/2014/main" id="{5E9F635D-DF29-C667-710E-2D22038C6B43}"/>
               </a:ext>
             </a:extLst>
           </p:cNvPr>
@@ -26506,7 +26472,7 @@
           <p:cNvPr id="2" name="Título 1">
             <a:extLst>
               <a:ext uri="{FF2B5EF4-FFF2-40B4-BE49-F238E27FC236}">
-                <a16:creationId xmlns:a16="http://schemas.microsoft.com/office/drawing/2014/main" xmlns="" id="{868D5143-C411-ADCB-BAB7-E5B85E844096}"/>
+                <a16:creationId xmlns:a16="http://schemas.microsoft.com/office/drawing/2014/main" id="{868D5143-C411-ADCB-BAB7-E5B85E844096}"/>
               </a:ext>
             </a:extLst>
           </p:cNvPr>
@@ -26534,7 +26500,7 @@
           <p:cNvPr id="3" name="Espaço Reservado para Conteúdo 2">
             <a:extLst>
               <a:ext uri="{FF2B5EF4-FFF2-40B4-BE49-F238E27FC236}">
-                <a16:creationId xmlns:a16="http://schemas.microsoft.com/office/drawing/2014/main" xmlns="" id="{CB85C345-8ED8-0184-A482-752AE4C0A4C6}"/>
+                <a16:creationId xmlns:a16="http://schemas.microsoft.com/office/drawing/2014/main" id="{CB85C345-8ED8-0184-A482-752AE4C0A4C6}"/>
               </a:ext>
             </a:extLst>
           </p:cNvPr>
@@ -26587,7 +26553,7 @@
           <p:cNvPr id="4" name="Picture 3">
             <a:extLst>
               <a:ext uri="{FF2B5EF4-FFF2-40B4-BE49-F238E27FC236}">
-                <a16:creationId xmlns:a16="http://schemas.microsoft.com/office/drawing/2014/main" xmlns="" id="{5E9F635D-DF29-C667-710E-2D22038C6B43}"/>
+                <a16:creationId xmlns:a16="http://schemas.microsoft.com/office/drawing/2014/main" id="{5E9F635D-DF29-C667-710E-2D22038C6B43}"/>
               </a:ext>
             </a:extLst>
           </p:cNvPr>
@@ -26652,7 +26618,7 @@
           <p:cNvPr id="2" name="Título 1">
             <a:extLst>
               <a:ext uri="{FF2B5EF4-FFF2-40B4-BE49-F238E27FC236}">
-                <a16:creationId xmlns:a16="http://schemas.microsoft.com/office/drawing/2014/main" xmlns="" id="{868D5143-C411-ADCB-BAB7-E5B85E844096}"/>
+                <a16:creationId xmlns:a16="http://schemas.microsoft.com/office/drawing/2014/main" id="{868D5143-C411-ADCB-BAB7-E5B85E844096}"/>
               </a:ext>
             </a:extLst>
           </p:cNvPr>
@@ -26680,7 +26646,7 @@
           <p:cNvPr id="3" name="Espaço Reservado para Conteúdo 2">
             <a:extLst>
               <a:ext uri="{FF2B5EF4-FFF2-40B4-BE49-F238E27FC236}">
-                <a16:creationId xmlns:a16="http://schemas.microsoft.com/office/drawing/2014/main" xmlns="" id="{CB85C345-8ED8-0184-A482-752AE4C0A4C6}"/>
+                <a16:creationId xmlns:a16="http://schemas.microsoft.com/office/drawing/2014/main" id="{CB85C345-8ED8-0184-A482-752AE4C0A4C6}"/>
               </a:ext>
             </a:extLst>
           </p:cNvPr>
@@ -26818,13 +26784,8 @@
           <a:p>
             <a:r>
               <a:rPr lang="pt-BR" dirty="0"/>
-              <a:t>O desempenho do modelo pode variar muito dependendo da divisão dos dados</a:t>
-            </a:r>
-            <a:r>
-              <a:rPr lang="pt-BR" dirty="0" smtClean="0"/>
-              <a:t>.</a:t>
-            </a:r>
-            <a:endParaRPr lang="pt-BR" dirty="0"/>
+              <a:t>O desempenho do modelo pode variar muito dependendo da divisão dos dados.</a:t>
+            </a:r>
           </a:p>
         </p:txBody>
       </p:sp>
@@ -26833,7 +26794,7 @@
           <p:cNvPr id="9" name="Agrupar 8">
             <a:extLst>
               <a:ext uri="{FF2B5EF4-FFF2-40B4-BE49-F238E27FC236}">
-                <a16:creationId xmlns:a16="http://schemas.microsoft.com/office/drawing/2014/main" xmlns="" id="{8790114D-705D-A2FD-152D-BC7526271942}"/>
+                <a16:creationId xmlns:a16="http://schemas.microsoft.com/office/drawing/2014/main" id="{8790114D-705D-A2FD-152D-BC7526271942}"/>
               </a:ext>
             </a:extLst>
           </p:cNvPr>
@@ -26853,7 +26814,7 @@
             <p:cNvPr id="1026" name="Picture 2">
               <a:extLst>
                 <a:ext uri="{FF2B5EF4-FFF2-40B4-BE49-F238E27FC236}">
-                  <a16:creationId xmlns:a16="http://schemas.microsoft.com/office/drawing/2014/main" xmlns="" id="{5236B481-9A31-4B6C-70DD-CFE793850D66}"/>
+                  <a16:creationId xmlns:a16="http://schemas.microsoft.com/office/drawing/2014/main" id="{5236B481-9A31-4B6C-70DD-CFE793850D66}"/>
                 </a:ext>
               </a:extLst>
             </p:cNvPr>
@@ -26900,7 +26861,7 @@
             <p:cNvPr id="5" name="Retângulo 4">
               <a:extLst>
                 <a:ext uri="{FF2B5EF4-FFF2-40B4-BE49-F238E27FC236}">
-                  <a16:creationId xmlns:a16="http://schemas.microsoft.com/office/drawing/2014/main" xmlns="" id="{09135A67-3B39-D233-A370-BF0CA8B71DBD}"/>
+                  <a16:creationId xmlns:a16="http://schemas.microsoft.com/office/drawing/2014/main" id="{09135A67-3B39-D233-A370-BF0CA8B71DBD}"/>
                 </a:ext>
               </a:extLst>
             </p:cNvPr>
@@ -26952,7 +26913,7 @@
             <p:cNvPr id="6" name="Retângulo 5">
               <a:extLst>
                 <a:ext uri="{FF2B5EF4-FFF2-40B4-BE49-F238E27FC236}">
-                  <a16:creationId xmlns:a16="http://schemas.microsoft.com/office/drawing/2014/main" xmlns="" id="{390B2A3A-3E0A-42C7-54A8-43B734BF131A}"/>
+                  <a16:creationId xmlns:a16="http://schemas.microsoft.com/office/drawing/2014/main" id="{390B2A3A-3E0A-42C7-54A8-43B734BF131A}"/>
                 </a:ext>
               </a:extLst>
             </p:cNvPr>
@@ -27004,7 +26965,7 @@
             <p:cNvPr id="7" name="CaixaDeTexto 6">
               <a:extLst>
                 <a:ext uri="{FF2B5EF4-FFF2-40B4-BE49-F238E27FC236}">
-                  <a16:creationId xmlns:a16="http://schemas.microsoft.com/office/drawing/2014/main" xmlns="" id="{ED9F4D39-D8D4-9DED-3C4F-B943BACB648D}"/>
+                  <a16:creationId xmlns:a16="http://schemas.microsoft.com/office/drawing/2014/main" id="{ED9F4D39-D8D4-9DED-3C4F-B943BACB648D}"/>
                 </a:ext>
               </a:extLst>
             </p:cNvPr>
@@ -27039,7 +27000,7 @@
             <p:cNvPr id="8" name="CaixaDeTexto 7">
               <a:extLst>
                 <a:ext uri="{FF2B5EF4-FFF2-40B4-BE49-F238E27FC236}">
-                  <a16:creationId xmlns:a16="http://schemas.microsoft.com/office/drawing/2014/main" xmlns="" id="{2B2BE920-10D9-C217-7B9D-509A2E453543}"/>
+                  <a16:creationId xmlns:a16="http://schemas.microsoft.com/office/drawing/2014/main" id="{2B2BE920-10D9-C217-7B9D-509A2E453543}"/>
                 </a:ext>
               </a:extLst>
             </p:cNvPr>
@@ -27105,7 +27066,7 @@
           <p:cNvPr id="2" name="Título 1">
             <a:extLst>
               <a:ext uri="{FF2B5EF4-FFF2-40B4-BE49-F238E27FC236}">
-                <a16:creationId xmlns:a16="http://schemas.microsoft.com/office/drawing/2014/main" xmlns="" id="{868D5143-C411-ADCB-BAB7-E5B85E844096}"/>
+                <a16:creationId xmlns:a16="http://schemas.microsoft.com/office/drawing/2014/main" id="{868D5143-C411-ADCB-BAB7-E5B85E844096}"/>
               </a:ext>
             </a:extLst>
           </p:cNvPr>
@@ -27133,7 +27094,7 @@
           <p:cNvPr id="3" name="Espaço Reservado para Conteúdo 2">
             <a:extLst>
               <a:ext uri="{FF2B5EF4-FFF2-40B4-BE49-F238E27FC236}">
-                <a16:creationId xmlns:a16="http://schemas.microsoft.com/office/drawing/2014/main" xmlns="" id="{CB85C345-8ED8-0184-A482-752AE4C0A4C6}"/>
+                <a16:creationId xmlns:a16="http://schemas.microsoft.com/office/drawing/2014/main" id="{CB85C345-8ED8-0184-A482-752AE4C0A4C6}"/>
               </a:ext>
             </a:extLst>
           </p:cNvPr>
@@ -27157,22 +27118,13 @@
           <a:lstStyle/>
           <a:p>
             <a:r>
-              <a:rPr lang="pt-BR" b="0" i="0" dirty="0" smtClean="0">
-                <a:solidFill>
-                  <a:srgbClr val="0F0F0F"/>
-                </a:solidFill>
-                <a:effectLst/>
-              </a:rPr>
-              <a:t>Além </a:t>
-            </a:r>
-            <a:r>
               <a:rPr lang="pt-BR" b="0" i="0" dirty="0">
                 <a:solidFill>
                   <a:srgbClr val="0F0F0F"/>
                 </a:solidFill>
                 <a:effectLst/>
               </a:rPr>
-              <a:t>disso, a </a:t>
+              <a:t>Além disso, a </a:t>
             </a:r>
             <a:r>
               <a:rPr lang="pt-BR" b="1" i="1" dirty="0">
@@ -27226,16 +27178,7 @@
                 </a:solidFill>
                 <a:effectLst/>
               </a:rPr>
-              <a:t> do </a:t>
-            </a:r>
-            <a:r>
-              <a:rPr lang="pt-BR" b="0" i="0" dirty="0" smtClean="0">
-                <a:solidFill>
-                  <a:srgbClr val="0F0F0F"/>
-                </a:solidFill>
-                <a:effectLst/>
-              </a:rPr>
-              <a:t>modelo.</a:t>
+              <a:t> do modelo.</a:t>
             </a:r>
           </a:p>
           <a:p>
@@ -27244,24 +27187,8 @@
               <a:buChar char="§"/>
             </a:pPr>
             <a:r>
-              <a:rPr lang="pt-BR" altLang="pt-BR" dirty="0" smtClean="0"/>
-              <a:t>Se </a:t>
-            </a:r>
-            <a:r>
               <a:rPr lang="pt-BR" altLang="pt-BR" dirty="0"/>
-              <a:t>o conjunto de </a:t>
-            </a:r>
-            <a:r>
-              <a:rPr lang="pt-BR" altLang="pt-BR" dirty="0" smtClean="0"/>
-              <a:t>validação for </a:t>
-            </a:r>
-            <a:r>
-              <a:rPr lang="pt-BR" altLang="pt-BR" dirty="0"/>
-              <a:t>“fácil”, o desempenho parecerá melhor que o </a:t>
-            </a:r>
-            <a:r>
-              <a:rPr lang="pt-BR" altLang="pt-BR" dirty="0" smtClean="0"/>
-              <a:t>real.</a:t>
+              <a:t>Se o conjunto de validação for “fácil”, o desempenho parecerá melhor que o real.</a:t>
             </a:r>
           </a:p>
           <a:p>
@@ -27270,18 +27197,10 @@
               <a:buChar char="§"/>
             </a:pPr>
             <a:r>
-              <a:rPr lang="pt-BR" altLang="pt-BR" dirty="0" smtClean="0"/>
-              <a:t>Se </a:t>
-            </a:r>
-            <a:r>
               <a:rPr lang="pt-BR" altLang="pt-BR" dirty="0"/>
-              <a:t>for “difícil” ou pouco representativo, parecerá pior</a:t>
-            </a:r>
-            <a:r>
-              <a:rPr lang="pt-BR" altLang="pt-BR" dirty="0" smtClean="0"/>
-              <a:t>.</a:t>
-            </a:r>
-            <a:endParaRPr lang="pt-BR" b="0" i="0" dirty="0" smtClean="0">
+              <a:t>Se for “difícil” ou pouco representativo, parecerá pior.</a:t>
+            </a:r>
+            <a:endParaRPr lang="pt-BR" b="0" i="0" dirty="0">
               <a:solidFill>
                 <a:srgbClr val="0F0F0F"/>
               </a:solidFill>
@@ -27290,20 +27209,12 @@
           </a:p>
           <a:p>
             <a:r>
-              <a:rPr lang="pt-BR" dirty="0" smtClean="0">
-                <a:solidFill>
-                  <a:srgbClr val="0F0F0F"/>
-                </a:solidFill>
-              </a:rPr>
-              <a:t>Em </a:t>
-            </a:r>
-            <a:r>
               <a:rPr lang="pt-BR" dirty="0">
                 <a:solidFill>
                   <a:srgbClr val="0F0F0F"/>
                 </a:solidFill>
               </a:rPr>
-              <a:t>geral, usa-se o </a:t>
+              <a:t>Em geral, usa-se o </a:t>
             </a:r>
             <a:r>
               <a:rPr lang="pt-BR" i="1" dirty="0">
@@ -27375,7 +27286,7 @@
           <p:cNvPr id="9" name="Agrupar 8">
             <a:extLst>
               <a:ext uri="{FF2B5EF4-FFF2-40B4-BE49-F238E27FC236}">
-                <a16:creationId xmlns:a16="http://schemas.microsoft.com/office/drawing/2014/main" xmlns="" id="{8790114D-705D-A2FD-152D-BC7526271942}"/>
+                <a16:creationId xmlns:a16="http://schemas.microsoft.com/office/drawing/2014/main" id="{8790114D-705D-A2FD-152D-BC7526271942}"/>
               </a:ext>
             </a:extLst>
           </p:cNvPr>
@@ -27395,7 +27306,7 @@
             <p:cNvPr id="1026" name="Picture 2">
               <a:extLst>
                 <a:ext uri="{FF2B5EF4-FFF2-40B4-BE49-F238E27FC236}">
-                  <a16:creationId xmlns:a16="http://schemas.microsoft.com/office/drawing/2014/main" xmlns="" id="{5236B481-9A31-4B6C-70DD-CFE793850D66}"/>
+                  <a16:creationId xmlns:a16="http://schemas.microsoft.com/office/drawing/2014/main" id="{5236B481-9A31-4B6C-70DD-CFE793850D66}"/>
                 </a:ext>
               </a:extLst>
             </p:cNvPr>
@@ -27442,7 +27353,7 @@
             <p:cNvPr id="5" name="Retângulo 4">
               <a:extLst>
                 <a:ext uri="{FF2B5EF4-FFF2-40B4-BE49-F238E27FC236}">
-                  <a16:creationId xmlns:a16="http://schemas.microsoft.com/office/drawing/2014/main" xmlns="" id="{09135A67-3B39-D233-A370-BF0CA8B71DBD}"/>
+                  <a16:creationId xmlns:a16="http://schemas.microsoft.com/office/drawing/2014/main" id="{09135A67-3B39-D233-A370-BF0CA8B71DBD}"/>
                 </a:ext>
               </a:extLst>
             </p:cNvPr>
@@ -27494,7 +27405,7 @@
             <p:cNvPr id="6" name="Retângulo 5">
               <a:extLst>
                 <a:ext uri="{FF2B5EF4-FFF2-40B4-BE49-F238E27FC236}">
-                  <a16:creationId xmlns:a16="http://schemas.microsoft.com/office/drawing/2014/main" xmlns="" id="{390B2A3A-3E0A-42C7-54A8-43B734BF131A}"/>
+                  <a16:creationId xmlns:a16="http://schemas.microsoft.com/office/drawing/2014/main" id="{390B2A3A-3E0A-42C7-54A8-43B734BF131A}"/>
                 </a:ext>
               </a:extLst>
             </p:cNvPr>
@@ -27546,7 +27457,7 @@
             <p:cNvPr id="7" name="CaixaDeTexto 6">
               <a:extLst>
                 <a:ext uri="{FF2B5EF4-FFF2-40B4-BE49-F238E27FC236}">
-                  <a16:creationId xmlns:a16="http://schemas.microsoft.com/office/drawing/2014/main" xmlns="" id="{ED9F4D39-D8D4-9DED-3C4F-B943BACB648D}"/>
+                  <a16:creationId xmlns:a16="http://schemas.microsoft.com/office/drawing/2014/main" id="{ED9F4D39-D8D4-9DED-3C4F-B943BACB648D}"/>
                 </a:ext>
               </a:extLst>
             </p:cNvPr>
@@ -27581,7 +27492,7 @@
             <p:cNvPr id="8" name="CaixaDeTexto 7">
               <a:extLst>
                 <a:ext uri="{FF2B5EF4-FFF2-40B4-BE49-F238E27FC236}">
-                  <a16:creationId xmlns:a16="http://schemas.microsoft.com/office/drawing/2014/main" xmlns="" id="{2B2BE920-10D9-C217-7B9D-509A2E453543}"/>
+                  <a16:creationId xmlns:a16="http://schemas.microsoft.com/office/drawing/2014/main" id="{2B2BE920-10D9-C217-7B9D-509A2E453543}"/>
                 </a:ext>
               </a:extLst>
             </p:cNvPr>
